--- a/document/art-gallery-problem.pptx
+++ b/document/art-gallery-problem.pptx
@@ -15,17 +15,18 @@
     <p:sldId id="291" r:id="rId9"/>
     <p:sldId id="293" r:id="rId10"/>
     <p:sldId id="262" r:id="rId11"/>
-    <p:sldId id="277" r:id="rId12"/>
-    <p:sldId id="363" r:id="rId13"/>
-    <p:sldId id="288" r:id="rId14"/>
-    <p:sldId id="263" r:id="rId15"/>
-    <p:sldId id="289" r:id="rId16"/>
-    <p:sldId id="366" r:id="rId17"/>
-    <p:sldId id="264" r:id="rId18"/>
-    <p:sldId id="274" r:id="rId19"/>
+    <p:sldId id="274" r:id="rId12"/>
+    <p:sldId id="264" r:id="rId13"/>
+    <p:sldId id="277" r:id="rId14"/>
+    <p:sldId id="363" r:id="rId15"/>
+    <p:sldId id="288" r:id="rId16"/>
+    <p:sldId id="263" r:id="rId17"/>
+    <p:sldId id="289" r:id="rId18"/>
+    <p:sldId id="366" r:id="rId19"/>
     <p:sldId id="367" r:id="rId20"/>
-    <p:sldId id="369" r:id="rId21"/>
-    <p:sldId id="371" r:id="rId22"/>
+    <p:sldId id="373" r:id="rId21"/>
+    <p:sldId id="369" r:id="rId22"/>
+    <p:sldId id="372" r:id="rId23"/>
   </p:sldIdLst>
   <p:sldSz cx="12192000" cy="6858000"/>
   <p:notesSz cx="6858000" cy="9144000"/>
@@ -279,7 +280,7 @@
           <a:p>
             <a:fld id="{F88B4CF7-4AF6-4F22-BEAD-2FF1E49FC008}" type="datetimeFigureOut">
               <a:rPr lang="ru-RU" smtClean="0"/>
-              <a:t>25.04.2025</a:t>
+              <a:t>27.04.2025</a:t>
             </a:fld>
             <a:endParaRPr lang="ru-RU"/>
           </a:p>
@@ -493,7 +494,7 @@
           <a:p>
             <a:fld id="{F88B4CF7-4AF6-4F22-BEAD-2FF1E49FC008}" type="datetimeFigureOut">
               <a:rPr lang="ru-RU" smtClean="0"/>
-              <a:t>25.04.2025</a:t>
+              <a:t>27.04.2025</a:t>
             </a:fld>
             <a:endParaRPr lang="ru-RU"/>
           </a:p>
@@ -701,7 +702,7 @@
           <a:p>
             <a:fld id="{F88B4CF7-4AF6-4F22-BEAD-2FF1E49FC008}" type="datetimeFigureOut">
               <a:rPr lang="ru-RU" smtClean="0"/>
-              <a:t>25.04.2025</a:t>
+              <a:t>27.04.2025</a:t>
             </a:fld>
             <a:endParaRPr lang="ru-RU"/>
           </a:p>
@@ -899,7 +900,7 @@
           <a:p>
             <a:fld id="{F88B4CF7-4AF6-4F22-BEAD-2FF1E49FC008}" type="datetimeFigureOut">
               <a:rPr lang="ru-RU" smtClean="0"/>
-              <a:t>25.04.2025</a:t>
+              <a:t>27.04.2025</a:t>
             </a:fld>
             <a:endParaRPr lang="ru-RU"/>
           </a:p>
@@ -1174,7 +1175,7 @@
           <a:p>
             <a:fld id="{F88B4CF7-4AF6-4F22-BEAD-2FF1E49FC008}" type="datetimeFigureOut">
               <a:rPr lang="ru-RU" smtClean="0"/>
-              <a:t>25.04.2025</a:t>
+              <a:t>27.04.2025</a:t>
             </a:fld>
             <a:endParaRPr lang="ru-RU"/>
           </a:p>
@@ -1439,7 +1440,7 @@
           <a:p>
             <a:fld id="{F88B4CF7-4AF6-4F22-BEAD-2FF1E49FC008}" type="datetimeFigureOut">
               <a:rPr lang="ru-RU" smtClean="0"/>
-              <a:t>25.04.2025</a:t>
+              <a:t>27.04.2025</a:t>
             </a:fld>
             <a:endParaRPr lang="ru-RU"/>
           </a:p>
@@ -1851,7 +1852,7 @@
           <a:p>
             <a:fld id="{F88B4CF7-4AF6-4F22-BEAD-2FF1E49FC008}" type="datetimeFigureOut">
               <a:rPr lang="ru-RU" smtClean="0"/>
-              <a:t>25.04.2025</a:t>
+              <a:t>27.04.2025</a:t>
             </a:fld>
             <a:endParaRPr lang="ru-RU"/>
           </a:p>
@@ -1992,7 +1993,7 @@
           <a:p>
             <a:fld id="{F88B4CF7-4AF6-4F22-BEAD-2FF1E49FC008}" type="datetimeFigureOut">
               <a:rPr lang="ru-RU" smtClean="0"/>
-              <a:t>25.04.2025</a:t>
+              <a:t>27.04.2025</a:t>
             </a:fld>
             <a:endParaRPr lang="ru-RU"/>
           </a:p>
@@ -2105,7 +2106,7 @@
           <a:p>
             <a:fld id="{F88B4CF7-4AF6-4F22-BEAD-2FF1E49FC008}" type="datetimeFigureOut">
               <a:rPr lang="ru-RU" smtClean="0"/>
-              <a:t>25.04.2025</a:t>
+              <a:t>27.04.2025</a:t>
             </a:fld>
             <a:endParaRPr lang="ru-RU"/>
           </a:p>
@@ -2416,7 +2417,7 @@
           <a:p>
             <a:fld id="{F88B4CF7-4AF6-4F22-BEAD-2FF1E49FC008}" type="datetimeFigureOut">
               <a:rPr lang="ru-RU" smtClean="0"/>
-              <a:t>25.04.2025</a:t>
+              <a:t>27.04.2025</a:t>
             </a:fld>
             <a:endParaRPr lang="ru-RU"/>
           </a:p>
@@ -2704,7 +2705,7 @@
           <a:p>
             <a:fld id="{F88B4CF7-4AF6-4F22-BEAD-2FF1E49FC008}" type="datetimeFigureOut">
               <a:rPr lang="ru-RU" smtClean="0"/>
-              <a:t>25.04.2025</a:t>
+              <a:t>27.04.2025</a:t>
             </a:fld>
             <a:endParaRPr lang="ru-RU"/>
           </a:p>
@@ -2945,7 +2946,7 @@
           <a:p>
             <a:fld id="{F88B4CF7-4AF6-4F22-BEAD-2FF1E49FC008}" type="datetimeFigureOut">
               <a:rPr lang="ru-RU" smtClean="0"/>
-              <a:t>25.04.2025</a:t>
+              <a:t>27.04.2025</a:t>
             </a:fld>
             <a:endParaRPr lang="ru-RU"/>
           </a:p>
@@ -3611,7 +3612,7 @@
             </a:pPr>
             <a:r>
               <a:rPr lang="ru-RU" sz="2400" dirty="0"/>
-              <a:t>Галерея представлена простым многоугольником</a:t>
+              <a:t>Галерея представлена многоугольником</a:t>
             </a:r>
             <a:r>
               <a:rPr lang="en-US" sz="2400" dirty="0"/>
@@ -3700,2124 +3701,8 @@
           <a:chExt cx="0" cy="0"/>
         </a:xfrm>
       </p:grpSpPr>
-      <p:sp>
-        <p:nvSpPr>
-          <p:cNvPr id="2" name="Заголовок 1">
-            <a:extLst>
-              <a:ext uri="{FF2B5EF4-FFF2-40B4-BE49-F238E27FC236}">
-                <a16:creationId xmlns:a16="http://schemas.microsoft.com/office/drawing/2014/main" id="{26D51D08-4E36-3C59-C285-A89819162EA3}"/>
-              </a:ext>
-            </a:extLst>
-          </p:cNvPr>
-          <p:cNvSpPr>
-            <a:spLocks noGrp="1"/>
-          </p:cNvSpPr>
-          <p:nvPr>
-            <p:ph type="title"/>
-          </p:nvPr>
-        </p:nvSpPr>
-        <p:spPr>
-          <a:xfrm>
-            <a:off x="1055688" y="730384"/>
-            <a:ext cx="10072461" cy="677075"/>
-          </a:xfrm>
-        </p:spPr>
-        <p:txBody>
-          <a:bodyPr>
-            <a:normAutofit/>
-          </a:bodyPr>
-          <a:lstStyle/>
-          <a:p>
-            <a:r>
-              <a:rPr lang="ru-RU" sz="4000" dirty="0"/>
-              <a:t>Выпуклые многоугольники</a:t>
-            </a:r>
-          </a:p>
-        </p:txBody>
-      </p:sp>
-      <p:pic>
-        <p:nvPicPr>
-          <p:cNvPr id="7" name="Рисунок 6" descr="Изображение выглядит как треугольник, линия&#10;&#10;Автоматически созданное описание">
-            <a:extLst>
-              <a:ext uri="{FF2B5EF4-FFF2-40B4-BE49-F238E27FC236}">
-                <a16:creationId xmlns:a16="http://schemas.microsoft.com/office/drawing/2014/main" id="{5C2287FC-D039-C102-88C4-24C7D5427978}"/>
-              </a:ext>
-            </a:extLst>
-          </p:cNvPr>
-          <p:cNvPicPr>
-            <a:picLocks noChangeAspect="1"/>
-          </p:cNvPicPr>
-          <p:nvPr/>
-        </p:nvPicPr>
-        <p:blipFill>
-          <a:blip r:embed="rId2">
-            <a:extLst>
-              <a:ext uri="{28A0092B-C50C-407E-A947-70E740481C1C}">
-                <a14:useLocalDpi xmlns:a14="http://schemas.microsoft.com/office/drawing/2010/main" val="0"/>
-              </a:ext>
-            </a:extLst>
-          </a:blip>
-          <a:stretch>
-            <a:fillRect/>
-          </a:stretch>
-        </p:blipFill>
-        <p:spPr>
-          <a:xfrm>
-            <a:off x="2269600" y="2718596"/>
-            <a:ext cx="3127153" cy="2817812"/>
-          </a:xfrm>
-          <a:prstGeom prst="rect">
-            <a:avLst/>
-          </a:prstGeom>
-        </p:spPr>
-      </p:pic>
-      <p:pic>
-        <p:nvPicPr>
-          <p:cNvPr id="8" name="Объект 4" descr="Изображение выглядит как диаграмма, линия, снимок экрана, дизайн&#10;&#10;Автоматически созданное описание">
-            <a:extLst>
-              <a:ext uri="{FF2B5EF4-FFF2-40B4-BE49-F238E27FC236}">
-                <a16:creationId xmlns:a16="http://schemas.microsoft.com/office/drawing/2014/main" id="{68ED7B39-277F-BE76-73A7-F2C29BF8099B}"/>
-              </a:ext>
-            </a:extLst>
-          </p:cNvPr>
-          <p:cNvPicPr>
-            <a:picLocks noChangeAspect="1"/>
-          </p:cNvPicPr>
-          <p:nvPr/>
-        </p:nvPicPr>
-        <p:blipFill>
-          <a:blip r:embed="rId3">
-            <a:extLst>
-              <a:ext uri="{28A0092B-C50C-407E-A947-70E740481C1C}">
-                <a14:useLocalDpi xmlns:a14="http://schemas.microsoft.com/office/drawing/2010/main" val="0"/>
-              </a:ext>
-            </a:extLst>
-          </a:blip>
-          <a:stretch>
-            <a:fillRect/>
-          </a:stretch>
-        </p:blipFill>
-        <p:spPr>
-          <a:xfrm>
-            <a:off x="5857794" y="2964829"/>
-            <a:ext cx="3965144" cy="2468779"/>
-          </a:xfrm>
-          <a:prstGeom prst="rect">
-            <a:avLst/>
-          </a:prstGeom>
-        </p:spPr>
-      </p:pic>
-      <p:sp>
-        <p:nvSpPr>
-          <p:cNvPr id="9" name="TextBox 8">
-            <a:extLst>
-              <a:ext uri="{FF2B5EF4-FFF2-40B4-BE49-F238E27FC236}">
-                <a16:creationId xmlns:a16="http://schemas.microsoft.com/office/drawing/2014/main" id="{36A6B241-AA3E-942F-EEDF-0E7B669FE535}"/>
-              </a:ext>
-            </a:extLst>
-          </p:cNvPr>
-          <p:cNvSpPr txBox="1"/>
-          <p:nvPr/>
-        </p:nvSpPr>
-        <p:spPr>
-          <a:xfrm>
-            <a:off x="1055688" y="1524413"/>
-            <a:ext cx="8852370" cy="830997"/>
-          </a:xfrm>
-          <a:prstGeom prst="rect">
-            <a:avLst/>
-          </a:prstGeom>
-          <a:noFill/>
-        </p:spPr>
-        <p:txBody>
-          <a:bodyPr wrap="square">
-            <a:spAutoFit/>
-          </a:bodyPr>
-          <a:lstStyle/>
-          <a:p>
-            <a:r>
-              <a:rPr lang="ru-RU" sz="2400" dirty="0"/>
-              <a:t>Каждый выпуклый компонент либо полностью виден, либо полностью не виден из вершины многоугольника.</a:t>
-            </a:r>
-          </a:p>
-        </p:txBody>
-      </p:sp>
-    </p:spTree>
-    <p:extLst>
-      <p:ext uri="{BB962C8B-B14F-4D97-AF65-F5344CB8AC3E}">
-        <p14:creationId xmlns:p14="http://schemas.microsoft.com/office/powerpoint/2010/main" val="855223049"/>
-      </p:ext>
-    </p:extLst>
-  </p:cSld>
-  <p:clrMapOvr>
-    <a:masterClrMapping/>
-  </p:clrMapOvr>
-</p:sld>
-</file>
-
-<file path=ppt/slides/slide12.xml><?xml version="1.0" encoding="utf-8"?>
-<p:sld xmlns:a="http://schemas.openxmlformats.org/drawingml/2006/main" xmlns:r="http://schemas.openxmlformats.org/officeDocument/2006/relationships" xmlns:p="http://schemas.openxmlformats.org/presentationml/2006/main">
-  <p:cSld>
-    <p:spTree>
-      <p:nvGrpSpPr>
-        <p:cNvPr id="1" name=""/>
-        <p:cNvGrpSpPr/>
-        <p:nvPr/>
-      </p:nvGrpSpPr>
-      <p:grpSpPr>
-        <a:xfrm>
-          <a:off x="0" y="0"/>
-          <a:ext cx="0" cy="0"/>
-          <a:chOff x="0" y="0"/>
-          <a:chExt cx="0" cy="0"/>
-        </a:xfrm>
-      </p:grpSpPr>
-      <p:pic>
-        <p:nvPicPr>
-          <p:cNvPr id="4" name="Рисунок 3" descr="Изображение выглядит как линия, круг&#10;&#10;Автоматически созданное описание">
-            <a:extLst>
-              <a:ext uri="{FF2B5EF4-FFF2-40B4-BE49-F238E27FC236}">
-                <a16:creationId xmlns:a16="http://schemas.microsoft.com/office/drawing/2014/main" id="{36CA5531-0CC4-A435-C571-D03258964374}"/>
-              </a:ext>
-            </a:extLst>
-          </p:cNvPr>
-          <p:cNvPicPr>
-            <a:picLocks noChangeAspect="1"/>
-          </p:cNvPicPr>
-          <p:nvPr/>
-        </p:nvPicPr>
-        <p:blipFill>
-          <a:blip r:embed="rId2">
-            <a:extLst>
-              <a:ext uri="{28A0092B-C50C-407E-A947-70E740481C1C}">
-                <a14:useLocalDpi xmlns:a14="http://schemas.microsoft.com/office/drawing/2010/main" val="0"/>
-              </a:ext>
-            </a:extLst>
-          </a:blip>
-          <a:stretch>
-            <a:fillRect/>
-          </a:stretch>
-        </p:blipFill>
-        <p:spPr>
-          <a:xfrm>
-            <a:off x="6409979" y="1873950"/>
-            <a:ext cx="3997829" cy="3907959"/>
-          </a:xfrm>
-          <a:prstGeom prst="rect">
-            <a:avLst/>
-          </a:prstGeom>
-        </p:spPr>
-      </p:pic>
-      <p:pic>
-        <p:nvPicPr>
-          <p:cNvPr id="6" name="Рисунок 5">
-            <a:extLst>
-              <a:ext uri="{FF2B5EF4-FFF2-40B4-BE49-F238E27FC236}">
-                <a16:creationId xmlns:a16="http://schemas.microsoft.com/office/drawing/2014/main" id="{F8C989E9-04CF-D24C-459A-411A00081432}"/>
-              </a:ext>
-            </a:extLst>
-          </p:cNvPr>
-          <p:cNvPicPr>
-            <a:picLocks noChangeAspect="1"/>
-          </p:cNvPicPr>
-          <p:nvPr/>
-        </p:nvPicPr>
-        <p:blipFill>
-          <a:blip r:embed="rId3">
-            <a:extLst>
-              <a:ext uri="{28A0092B-C50C-407E-A947-70E740481C1C}">
-                <a14:useLocalDpi xmlns:a14="http://schemas.microsoft.com/office/drawing/2010/main" val="0"/>
-              </a:ext>
-            </a:extLst>
-          </a:blip>
-          <a:stretch>
-            <a:fillRect/>
-          </a:stretch>
-        </p:blipFill>
-        <p:spPr>
-          <a:xfrm>
-            <a:off x="1369666" y="1825956"/>
-            <a:ext cx="4726334" cy="4421570"/>
-          </a:xfrm>
-          <a:prstGeom prst="rect">
-            <a:avLst/>
-          </a:prstGeom>
-        </p:spPr>
-      </p:pic>
-      <p:sp>
-        <p:nvSpPr>
-          <p:cNvPr id="9" name="Заголовок 1">
-            <a:extLst>
-              <a:ext uri="{FF2B5EF4-FFF2-40B4-BE49-F238E27FC236}">
-                <a16:creationId xmlns:a16="http://schemas.microsoft.com/office/drawing/2014/main" id="{46D24553-23AB-8D92-20DD-E21A805FA97B}"/>
-              </a:ext>
-            </a:extLst>
-          </p:cNvPr>
-          <p:cNvSpPr>
-            <a:spLocks noGrp="1"/>
-          </p:cNvSpPr>
-          <p:nvPr>
-            <p:ph type="title"/>
-          </p:nvPr>
-        </p:nvSpPr>
-        <p:spPr>
-          <a:xfrm>
-            <a:off x="1055688" y="728664"/>
-            <a:ext cx="10080625" cy="678796"/>
-          </a:xfrm>
-        </p:spPr>
-        <p:txBody>
-          <a:bodyPr>
-            <a:normAutofit/>
-          </a:bodyPr>
-          <a:lstStyle/>
-          <a:p>
-            <a:r>
-              <a:rPr lang="ru-RU" sz="4000" dirty="0"/>
-              <a:t>Звездчатые и веерные многоугольники</a:t>
-            </a:r>
-          </a:p>
-        </p:txBody>
-      </p:sp>
-    </p:spTree>
-    <p:extLst>
-      <p:ext uri="{BB962C8B-B14F-4D97-AF65-F5344CB8AC3E}">
-        <p14:creationId xmlns:p14="http://schemas.microsoft.com/office/powerpoint/2010/main" val="4185973192"/>
-      </p:ext>
-    </p:extLst>
-  </p:cSld>
-  <p:clrMapOvr>
-    <a:masterClrMapping/>
-  </p:clrMapOvr>
-</p:sld>
-</file>
-
-<file path=ppt/slides/slide13.xml><?xml version="1.0" encoding="utf-8"?>
-<p:sld xmlns:a="http://schemas.openxmlformats.org/drawingml/2006/main" xmlns:r="http://schemas.openxmlformats.org/officeDocument/2006/relationships" xmlns:p="http://schemas.openxmlformats.org/presentationml/2006/main">
-  <p:cSld>
-    <p:spTree>
-      <p:nvGrpSpPr>
-        <p:cNvPr id="1" name=""/>
-        <p:cNvGrpSpPr/>
-        <p:nvPr/>
-      </p:nvGrpSpPr>
-      <p:grpSpPr>
-        <a:xfrm>
-          <a:off x="0" y="0"/>
-          <a:ext cx="0" cy="0"/>
-          <a:chOff x="0" y="0"/>
-          <a:chExt cx="0" cy="0"/>
-        </a:xfrm>
-      </p:grpSpPr>
-      <p:sp>
-        <p:nvSpPr>
-          <p:cNvPr id="2" name="Заголовок 1">
-            <a:extLst>
-              <a:ext uri="{FF2B5EF4-FFF2-40B4-BE49-F238E27FC236}">
-                <a16:creationId xmlns:a16="http://schemas.microsoft.com/office/drawing/2014/main" id="{78CC4E43-432F-FF98-376F-55D04A47FC4A}"/>
-              </a:ext>
-            </a:extLst>
-          </p:cNvPr>
-          <p:cNvSpPr>
-            <a:spLocks noGrp="1"/>
-          </p:cNvSpPr>
-          <p:nvPr>
-            <p:ph type="title"/>
-          </p:nvPr>
-        </p:nvSpPr>
-        <p:spPr>
-          <a:xfrm>
-            <a:off x="838200" y="365125"/>
-            <a:ext cx="10515600" cy="1325563"/>
-          </a:xfrm>
-        </p:spPr>
-        <p:txBody>
-          <a:bodyPr/>
-          <a:lstStyle/>
-          <a:p>
-            <a:r>
-              <a:rPr lang="ru-RU" dirty="0"/>
-              <a:t>Многоугольник с покрытыми стенами</a:t>
-            </a:r>
-          </a:p>
-        </p:txBody>
-      </p:sp>
-      <p:pic>
-        <p:nvPicPr>
-          <p:cNvPr id="5" name="Объект 4" descr="Изображение выглядит как линия, диаграмма, Параллельный, График&#10;&#10;Автоматически созданное описание">
-            <a:extLst>
-              <a:ext uri="{FF2B5EF4-FFF2-40B4-BE49-F238E27FC236}">
-                <a16:creationId xmlns:a16="http://schemas.microsoft.com/office/drawing/2014/main" id="{7FBEAAA4-25BF-5F5A-A161-054399257F85}"/>
-              </a:ext>
-            </a:extLst>
-          </p:cNvPr>
-          <p:cNvPicPr>
-            <a:picLocks noGrp="1" noChangeAspect="1"/>
-          </p:cNvPicPr>
-          <p:nvPr>
-            <p:ph idx="1"/>
-          </p:nvPr>
-        </p:nvPicPr>
-        <p:blipFill>
-          <a:blip r:embed="rId2">
-            <a:extLst>
-              <a:ext uri="{28A0092B-C50C-407E-A947-70E740481C1C}">
-                <a14:useLocalDpi xmlns:a14="http://schemas.microsoft.com/office/drawing/2010/main" val="0"/>
-              </a:ext>
-            </a:extLst>
-          </a:blip>
-          <a:stretch>
-            <a:fillRect/>
-          </a:stretch>
-        </p:blipFill>
-        <p:spPr>
-          <a:xfrm>
-            <a:off x="4255049" y="1825625"/>
-            <a:ext cx="3681901" cy="4351338"/>
-          </a:xfrm>
-        </p:spPr>
-      </p:pic>
-    </p:spTree>
-    <p:extLst>
-      <p:ext uri="{BB962C8B-B14F-4D97-AF65-F5344CB8AC3E}">
-        <p14:creationId xmlns:p14="http://schemas.microsoft.com/office/powerpoint/2010/main" val="2571953755"/>
-      </p:ext>
-    </p:extLst>
-  </p:cSld>
-  <p:clrMapOvr>
-    <a:masterClrMapping/>
-  </p:clrMapOvr>
-</p:sld>
-</file>
-
-<file path=ppt/slides/slide14.xml><?xml version="1.0" encoding="utf-8"?>
-<p:sld xmlns:a="http://schemas.openxmlformats.org/drawingml/2006/main" xmlns:r="http://schemas.openxmlformats.org/officeDocument/2006/relationships" xmlns:p="http://schemas.openxmlformats.org/presentationml/2006/main">
-  <p:cSld>
-    <p:spTree>
-      <p:nvGrpSpPr>
-        <p:cNvPr id="1" name=""/>
-        <p:cNvGrpSpPr/>
-        <p:nvPr/>
-      </p:nvGrpSpPr>
-      <p:grpSpPr>
-        <a:xfrm>
-          <a:off x="0" y="0"/>
-          <a:ext cx="0" cy="0"/>
-          <a:chOff x="0" y="0"/>
-          <a:chExt cx="0" cy="0"/>
-        </a:xfrm>
-      </p:grpSpPr>
-      <p:sp>
-        <p:nvSpPr>
-          <p:cNvPr id="3" name="Заголовок 1">
-            <a:extLst>
-              <a:ext uri="{FF2B5EF4-FFF2-40B4-BE49-F238E27FC236}">
-                <a16:creationId xmlns:a16="http://schemas.microsoft.com/office/drawing/2014/main" id="{8D29F20A-2427-966B-F9DE-8D08B91BBE73}"/>
-              </a:ext>
-            </a:extLst>
-          </p:cNvPr>
-          <p:cNvSpPr txBox="1">
-            <a:spLocks/>
-          </p:cNvSpPr>
-          <p:nvPr/>
-        </p:nvSpPr>
-        <p:spPr>
-          <a:xfrm>
-            <a:off x="1055688" y="728664"/>
-            <a:ext cx="10080625" cy="678796"/>
-          </a:xfrm>
-          <a:prstGeom prst="rect">
-            <a:avLst/>
-          </a:prstGeom>
-        </p:spPr>
-        <p:txBody>
-          <a:bodyPr vert="horz" lIns="91440" tIns="45720" rIns="91440" bIns="45720" rtlCol="0" anchor="b">
-            <a:normAutofit/>
-          </a:bodyPr>
-          <a:lstStyle>
-            <a:lvl1pPr algn="l" defTabSz="914400" rtl="0" eaLnBrk="1" latinLnBrk="0" hangingPunct="1">
-              <a:lnSpc>
-                <a:spcPct val="90000"/>
-              </a:lnSpc>
-              <a:spcBef>
-                <a:spcPct val="0"/>
-              </a:spcBef>
-              <a:buNone/>
-              <a:defRPr sz="6000" kern="1200">
-                <a:solidFill>
-                  <a:schemeClr val="tx1"/>
-                </a:solidFill>
-                <a:latin typeface="+mj-lt"/>
-                <a:ea typeface="+mj-ea"/>
-                <a:cs typeface="+mj-cs"/>
-              </a:defRPr>
-            </a:lvl1pPr>
-          </a:lstStyle>
-          <a:p>
-            <a:r>
-              <a:rPr lang="ru-RU" sz="4000" dirty="0"/>
-              <a:t>Разбиение на компоненты видимости</a:t>
-            </a:r>
-          </a:p>
-        </p:txBody>
-      </p:sp>
-      <p:pic>
-        <p:nvPicPr>
-          <p:cNvPr id="5" name="Рисунок 4">
-            <a:extLst>
-              <a:ext uri="{FF2B5EF4-FFF2-40B4-BE49-F238E27FC236}">
-                <a16:creationId xmlns:a16="http://schemas.microsoft.com/office/drawing/2014/main" id="{0985357B-E1EA-4CAE-ADAF-69E4C4944FC0}"/>
-              </a:ext>
-            </a:extLst>
-          </p:cNvPr>
-          <p:cNvPicPr>
-            <a:picLocks noChangeAspect="1"/>
-          </p:cNvPicPr>
-          <p:nvPr/>
-        </p:nvPicPr>
-        <p:blipFill>
-          <a:blip r:embed="rId2">
-            <a:extLst>
-              <a:ext uri="{28A0092B-C50C-407E-A947-70E740481C1C}">
-                <a14:useLocalDpi xmlns:a14="http://schemas.microsoft.com/office/drawing/2010/main" val="0"/>
-              </a:ext>
-            </a:extLst>
-          </a:blip>
-          <a:stretch>
-            <a:fillRect/>
-          </a:stretch>
-        </p:blipFill>
-        <p:spPr>
-          <a:xfrm>
-            <a:off x="8124585" y="1998147"/>
-            <a:ext cx="3409005" cy="3366814"/>
-          </a:xfrm>
-          <a:prstGeom prst="rect">
-            <a:avLst/>
-          </a:prstGeom>
-        </p:spPr>
-      </p:pic>
-      <p:pic>
-        <p:nvPicPr>
-          <p:cNvPr id="7" name="Рисунок 6">
-            <a:extLst>
-              <a:ext uri="{FF2B5EF4-FFF2-40B4-BE49-F238E27FC236}">
-                <a16:creationId xmlns:a16="http://schemas.microsoft.com/office/drawing/2014/main" id="{D21F928F-6088-7EB3-7603-A7E1E626C7AF}"/>
-              </a:ext>
-            </a:extLst>
-          </p:cNvPr>
-          <p:cNvPicPr>
-            <a:picLocks noChangeAspect="1"/>
-          </p:cNvPicPr>
-          <p:nvPr/>
-        </p:nvPicPr>
-        <p:blipFill>
-          <a:blip r:embed="rId3">
-            <a:extLst>
-              <a:ext uri="{28A0092B-C50C-407E-A947-70E740481C1C}">
-                <a14:useLocalDpi xmlns:a14="http://schemas.microsoft.com/office/drawing/2010/main" val="0"/>
-              </a:ext>
-            </a:extLst>
-          </a:blip>
-          <a:stretch>
-            <a:fillRect/>
-          </a:stretch>
-        </p:blipFill>
-        <p:spPr>
-          <a:xfrm>
-            <a:off x="4557152" y="1877515"/>
-            <a:ext cx="3271078" cy="3643527"/>
-          </a:xfrm>
-          <a:prstGeom prst="rect">
-            <a:avLst/>
-          </a:prstGeom>
-        </p:spPr>
-      </p:pic>
-      <p:pic>
-        <p:nvPicPr>
-          <p:cNvPr id="9" name="Рисунок 8">
-            <a:extLst>
-              <a:ext uri="{FF2B5EF4-FFF2-40B4-BE49-F238E27FC236}">
-                <a16:creationId xmlns:a16="http://schemas.microsoft.com/office/drawing/2014/main" id="{2A283B3A-9EDB-7FA4-E3E8-F6975C739B80}"/>
-              </a:ext>
-            </a:extLst>
-          </p:cNvPr>
-          <p:cNvPicPr>
-            <a:picLocks noChangeAspect="1"/>
-          </p:cNvPicPr>
-          <p:nvPr/>
-        </p:nvPicPr>
-        <p:blipFill>
-          <a:blip r:embed="rId4">
-            <a:extLst>
-              <a:ext uri="{28A0092B-C50C-407E-A947-70E740481C1C}">
-                <a14:useLocalDpi xmlns:a14="http://schemas.microsoft.com/office/drawing/2010/main" val="0"/>
-              </a:ext>
-            </a:extLst>
-          </a:blip>
-          <a:stretch>
-            <a:fillRect/>
-          </a:stretch>
-        </p:blipFill>
-        <p:spPr>
-          <a:xfrm>
-            <a:off x="293600" y="1998147"/>
-            <a:ext cx="4160515" cy="3280228"/>
-          </a:xfrm>
-          <a:prstGeom prst="rect">
-            <a:avLst/>
-          </a:prstGeom>
-        </p:spPr>
-      </p:pic>
-    </p:spTree>
-    <p:extLst>
-      <p:ext uri="{BB962C8B-B14F-4D97-AF65-F5344CB8AC3E}">
-        <p14:creationId xmlns:p14="http://schemas.microsoft.com/office/powerpoint/2010/main" val="1478404042"/>
-      </p:ext>
-    </p:extLst>
-  </p:cSld>
-  <p:clrMapOvr>
-    <a:masterClrMapping/>
-  </p:clrMapOvr>
-</p:sld>
-</file>
-
-<file path=ppt/slides/slide15.xml><?xml version="1.0" encoding="utf-8"?>
-<p:sld xmlns:a="http://schemas.openxmlformats.org/drawingml/2006/main" xmlns:r="http://schemas.openxmlformats.org/officeDocument/2006/relationships" xmlns:p="http://schemas.openxmlformats.org/presentationml/2006/main">
-  <p:cSld>
-    <p:spTree>
-      <p:nvGrpSpPr>
-        <p:cNvPr id="1" name=""/>
-        <p:cNvGrpSpPr/>
-        <p:nvPr/>
-      </p:nvGrpSpPr>
-      <p:grpSpPr>
-        <a:xfrm>
-          <a:off x="0" y="0"/>
-          <a:ext cx="0" cy="0"/>
-          <a:chOff x="0" y="0"/>
-          <a:chExt cx="0" cy="0"/>
-        </a:xfrm>
-      </p:grpSpPr>
-      <p:sp>
-        <p:nvSpPr>
-          <p:cNvPr id="4" name="Овал 3">
-            <a:extLst>
-              <a:ext uri="{FF2B5EF4-FFF2-40B4-BE49-F238E27FC236}">
-                <a16:creationId xmlns:a16="http://schemas.microsoft.com/office/drawing/2014/main" id="{36CA5298-7C21-7200-6C14-9D599889A17F}"/>
-              </a:ext>
-            </a:extLst>
-          </p:cNvPr>
-          <p:cNvSpPr/>
-          <p:nvPr/>
-        </p:nvSpPr>
-        <p:spPr>
-          <a:xfrm>
-            <a:off x="5725177" y="2675236"/>
-            <a:ext cx="210065" cy="210065"/>
-          </a:xfrm>
-          <a:prstGeom prst="ellipse">
-            <a:avLst/>
-          </a:prstGeom>
-          <a:solidFill>
-            <a:schemeClr val="bg2">
-              <a:lumMod val="75000"/>
-            </a:schemeClr>
-          </a:solidFill>
-          <a:ln>
-            <a:solidFill>
-              <a:schemeClr val="tx1">
-                <a:lumMod val="95000"/>
-                <a:lumOff val="5000"/>
-              </a:schemeClr>
-            </a:solidFill>
-          </a:ln>
-        </p:spPr>
-        <p:style>
-          <a:lnRef idx="2">
-            <a:schemeClr val="accent1">
-              <a:shade val="15000"/>
-            </a:schemeClr>
-          </a:lnRef>
-          <a:fillRef idx="1">
-            <a:schemeClr val="accent1"/>
-          </a:fillRef>
-          <a:effectRef idx="0">
-            <a:schemeClr val="accent1"/>
-          </a:effectRef>
-          <a:fontRef idx="minor">
-            <a:schemeClr val="lt1"/>
-          </a:fontRef>
-        </p:style>
-        <p:txBody>
-          <a:bodyPr rtlCol="0" anchor="ctr"/>
-          <a:lstStyle/>
-          <a:p>
-            <a:pPr algn="ctr"/>
-            <a:endParaRPr lang="ru-RU"/>
-          </a:p>
-        </p:txBody>
-      </p:sp>
-      <p:sp>
-        <p:nvSpPr>
-          <p:cNvPr id="5" name="Овал 4">
-            <a:extLst>
-              <a:ext uri="{FF2B5EF4-FFF2-40B4-BE49-F238E27FC236}">
-                <a16:creationId xmlns:a16="http://schemas.microsoft.com/office/drawing/2014/main" id="{87A471E0-E7BA-A3A0-A4BF-AEBD6F2C6890}"/>
-              </a:ext>
-            </a:extLst>
-          </p:cNvPr>
-          <p:cNvSpPr/>
-          <p:nvPr/>
-        </p:nvSpPr>
-        <p:spPr>
-          <a:xfrm>
-            <a:off x="4723796" y="2675236"/>
-            <a:ext cx="210065" cy="210065"/>
-          </a:xfrm>
-          <a:prstGeom prst="ellipse">
-            <a:avLst/>
-          </a:prstGeom>
-          <a:solidFill>
-            <a:schemeClr val="bg2">
-              <a:lumMod val="75000"/>
-            </a:schemeClr>
-          </a:solidFill>
-          <a:ln>
-            <a:solidFill>
-              <a:schemeClr val="tx1">
-                <a:lumMod val="95000"/>
-                <a:lumOff val="5000"/>
-              </a:schemeClr>
-            </a:solidFill>
-          </a:ln>
-        </p:spPr>
-        <p:style>
-          <a:lnRef idx="2">
-            <a:schemeClr val="accent1">
-              <a:shade val="15000"/>
-            </a:schemeClr>
-          </a:lnRef>
-          <a:fillRef idx="1">
-            <a:schemeClr val="accent1"/>
-          </a:fillRef>
-          <a:effectRef idx="0">
-            <a:schemeClr val="accent1"/>
-          </a:effectRef>
-          <a:fontRef idx="minor">
-            <a:schemeClr val="lt1"/>
-          </a:fontRef>
-        </p:style>
-        <p:txBody>
-          <a:bodyPr rtlCol="0" anchor="ctr"/>
-          <a:lstStyle/>
-          <a:p>
-            <a:pPr algn="ctr"/>
-            <a:endParaRPr lang="ru-RU"/>
-          </a:p>
-        </p:txBody>
-      </p:sp>
-      <p:sp>
-        <p:nvSpPr>
-          <p:cNvPr id="7" name="Овал 6">
-            <a:extLst>
-              <a:ext uri="{FF2B5EF4-FFF2-40B4-BE49-F238E27FC236}">
-                <a16:creationId xmlns:a16="http://schemas.microsoft.com/office/drawing/2014/main" id="{2352E168-6D39-0ECF-B6C3-3BC87366477D}"/>
-              </a:ext>
-            </a:extLst>
-          </p:cNvPr>
-          <p:cNvSpPr/>
-          <p:nvPr/>
-        </p:nvSpPr>
-        <p:spPr>
-          <a:xfrm>
-            <a:off x="6726558" y="2675237"/>
-            <a:ext cx="210065" cy="210065"/>
-          </a:xfrm>
-          <a:prstGeom prst="ellipse">
-            <a:avLst/>
-          </a:prstGeom>
-          <a:solidFill>
-            <a:schemeClr val="bg2">
-              <a:lumMod val="75000"/>
-            </a:schemeClr>
-          </a:solidFill>
-          <a:ln>
-            <a:solidFill>
-              <a:schemeClr val="tx1">
-                <a:lumMod val="95000"/>
-                <a:lumOff val="5000"/>
-              </a:schemeClr>
-            </a:solidFill>
-          </a:ln>
-        </p:spPr>
-        <p:style>
-          <a:lnRef idx="2">
-            <a:schemeClr val="accent1">
-              <a:shade val="15000"/>
-            </a:schemeClr>
-          </a:lnRef>
-          <a:fillRef idx="1">
-            <a:schemeClr val="accent1"/>
-          </a:fillRef>
-          <a:effectRef idx="0">
-            <a:schemeClr val="accent1"/>
-          </a:effectRef>
-          <a:fontRef idx="minor">
-            <a:schemeClr val="lt1"/>
-          </a:fontRef>
-        </p:style>
-        <p:txBody>
-          <a:bodyPr rtlCol="0" anchor="ctr"/>
-          <a:lstStyle/>
-          <a:p>
-            <a:pPr algn="ctr"/>
-            <a:endParaRPr lang="ru-RU"/>
-          </a:p>
-        </p:txBody>
-      </p:sp>
-      <p:sp>
-        <p:nvSpPr>
-          <p:cNvPr id="8" name="Овал 7">
-            <a:extLst>
-              <a:ext uri="{FF2B5EF4-FFF2-40B4-BE49-F238E27FC236}">
-                <a16:creationId xmlns:a16="http://schemas.microsoft.com/office/drawing/2014/main" id="{C344E232-BB96-646D-1A80-2FC592BFA6FB}"/>
-              </a:ext>
-            </a:extLst>
-          </p:cNvPr>
-          <p:cNvSpPr/>
-          <p:nvPr/>
-        </p:nvSpPr>
-        <p:spPr>
-          <a:xfrm>
-            <a:off x="5725177" y="3323967"/>
-            <a:ext cx="210065" cy="210065"/>
-          </a:xfrm>
-          <a:prstGeom prst="ellipse">
-            <a:avLst/>
-          </a:prstGeom>
-          <a:solidFill>
-            <a:schemeClr val="bg2">
-              <a:lumMod val="75000"/>
-            </a:schemeClr>
-          </a:solidFill>
-          <a:ln>
-            <a:solidFill>
-              <a:schemeClr val="tx1">
-                <a:lumMod val="95000"/>
-                <a:lumOff val="5000"/>
-              </a:schemeClr>
-            </a:solidFill>
-          </a:ln>
-        </p:spPr>
-        <p:style>
-          <a:lnRef idx="2">
-            <a:schemeClr val="accent1">
-              <a:shade val="15000"/>
-            </a:schemeClr>
-          </a:lnRef>
-          <a:fillRef idx="1">
-            <a:schemeClr val="accent1"/>
-          </a:fillRef>
-          <a:effectRef idx="0">
-            <a:schemeClr val="accent1"/>
-          </a:effectRef>
-          <a:fontRef idx="minor">
-            <a:schemeClr val="lt1"/>
-          </a:fontRef>
-        </p:style>
-        <p:txBody>
-          <a:bodyPr rtlCol="0" anchor="ctr"/>
-          <a:lstStyle/>
-          <a:p>
-            <a:pPr algn="ctr"/>
-            <a:endParaRPr lang="ru-RU"/>
-          </a:p>
-        </p:txBody>
-      </p:sp>
-      <p:sp>
-        <p:nvSpPr>
-          <p:cNvPr id="9" name="Овал 8">
-            <a:extLst>
-              <a:ext uri="{FF2B5EF4-FFF2-40B4-BE49-F238E27FC236}">
-                <a16:creationId xmlns:a16="http://schemas.microsoft.com/office/drawing/2014/main" id="{3C4DD965-5CBC-E08C-D7D9-609CA0C02AC8}"/>
-              </a:ext>
-            </a:extLst>
-          </p:cNvPr>
-          <p:cNvSpPr/>
-          <p:nvPr/>
-        </p:nvSpPr>
-        <p:spPr>
-          <a:xfrm>
-            <a:off x="4723796" y="3323967"/>
-            <a:ext cx="210065" cy="210065"/>
-          </a:xfrm>
-          <a:prstGeom prst="ellipse">
-            <a:avLst/>
-          </a:prstGeom>
-          <a:solidFill>
-            <a:schemeClr val="bg2">
-              <a:lumMod val="75000"/>
-            </a:schemeClr>
-          </a:solidFill>
-          <a:ln>
-            <a:solidFill>
-              <a:schemeClr val="tx1">
-                <a:lumMod val="95000"/>
-                <a:lumOff val="5000"/>
-              </a:schemeClr>
-            </a:solidFill>
-          </a:ln>
-        </p:spPr>
-        <p:style>
-          <a:lnRef idx="2">
-            <a:schemeClr val="accent1">
-              <a:shade val="15000"/>
-            </a:schemeClr>
-          </a:lnRef>
-          <a:fillRef idx="1">
-            <a:schemeClr val="accent1"/>
-          </a:fillRef>
-          <a:effectRef idx="0">
-            <a:schemeClr val="accent1"/>
-          </a:effectRef>
-          <a:fontRef idx="minor">
-            <a:schemeClr val="lt1"/>
-          </a:fontRef>
-        </p:style>
-        <p:txBody>
-          <a:bodyPr rtlCol="0" anchor="ctr"/>
-          <a:lstStyle/>
-          <a:p>
-            <a:pPr algn="ctr"/>
-            <a:endParaRPr lang="ru-RU"/>
-          </a:p>
-        </p:txBody>
-      </p:sp>
-      <p:sp>
-        <p:nvSpPr>
-          <p:cNvPr id="10" name="Овал 9">
-            <a:extLst>
-              <a:ext uri="{FF2B5EF4-FFF2-40B4-BE49-F238E27FC236}">
-                <a16:creationId xmlns:a16="http://schemas.microsoft.com/office/drawing/2014/main" id="{F9823872-924B-2122-69CE-6E513566986C}"/>
-              </a:ext>
-            </a:extLst>
-          </p:cNvPr>
-          <p:cNvSpPr/>
-          <p:nvPr/>
-        </p:nvSpPr>
-        <p:spPr>
-          <a:xfrm>
-            <a:off x="6726558" y="3323968"/>
-            <a:ext cx="210065" cy="210065"/>
-          </a:xfrm>
-          <a:prstGeom prst="ellipse">
-            <a:avLst/>
-          </a:prstGeom>
-          <a:solidFill>
-            <a:schemeClr val="bg2">
-              <a:lumMod val="75000"/>
-            </a:schemeClr>
-          </a:solidFill>
-          <a:ln>
-            <a:solidFill>
-              <a:schemeClr val="tx1">
-                <a:lumMod val="95000"/>
-                <a:lumOff val="5000"/>
-              </a:schemeClr>
-            </a:solidFill>
-          </a:ln>
-        </p:spPr>
-        <p:style>
-          <a:lnRef idx="2">
-            <a:schemeClr val="accent1">
-              <a:shade val="15000"/>
-            </a:schemeClr>
-          </a:lnRef>
-          <a:fillRef idx="1">
-            <a:schemeClr val="accent1"/>
-          </a:fillRef>
-          <a:effectRef idx="0">
-            <a:schemeClr val="accent1"/>
-          </a:effectRef>
-          <a:fontRef idx="minor">
-            <a:schemeClr val="lt1"/>
-          </a:fontRef>
-        </p:style>
-        <p:txBody>
-          <a:bodyPr rtlCol="0" anchor="ctr"/>
-          <a:lstStyle/>
-          <a:p>
-            <a:pPr algn="ctr"/>
-            <a:endParaRPr lang="ru-RU"/>
-          </a:p>
-        </p:txBody>
-      </p:sp>
-      <p:sp>
-        <p:nvSpPr>
-          <p:cNvPr id="11" name="Овал 10">
-            <a:extLst>
-              <a:ext uri="{FF2B5EF4-FFF2-40B4-BE49-F238E27FC236}">
-                <a16:creationId xmlns:a16="http://schemas.microsoft.com/office/drawing/2014/main" id="{4AD0AA00-E293-5205-F2F2-72DDD4B187BE}"/>
-              </a:ext>
-            </a:extLst>
-          </p:cNvPr>
-          <p:cNvSpPr/>
-          <p:nvPr/>
-        </p:nvSpPr>
-        <p:spPr>
-          <a:xfrm>
-            <a:off x="5725177" y="3972698"/>
-            <a:ext cx="210065" cy="210065"/>
-          </a:xfrm>
-          <a:prstGeom prst="ellipse">
-            <a:avLst/>
-          </a:prstGeom>
-          <a:solidFill>
-            <a:schemeClr val="bg2">
-              <a:lumMod val="75000"/>
-            </a:schemeClr>
-          </a:solidFill>
-          <a:ln>
-            <a:solidFill>
-              <a:schemeClr val="tx1">
-                <a:lumMod val="95000"/>
-                <a:lumOff val="5000"/>
-              </a:schemeClr>
-            </a:solidFill>
-          </a:ln>
-        </p:spPr>
-        <p:style>
-          <a:lnRef idx="2">
-            <a:schemeClr val="accent1">
-              <a:shade val="15000"/>
-            </a:schemeClr>
-          </a:lnRef>
-          <a:fillRef idx="1">
-            <a:schemeClr val="accent1"/>
-          </a:fillRef>
-          <a:effectRef idx="0">
-            <a:schemeClr val="accent1"/>
-          </a:effectRef>
-          <a:fontRef idx="minor">
-            <a:schemeClr val="lt1"/>
-          </a:fontRef>
-        </p:style>
-        <p:txBody>
-          <a:bodyPr rtlCol="0" anchor="ctr"/>
-          <a:lstStyle/>
-          <a:p>
-            <a:pPr algn="ctr"/>
-            <a:endParaRPr lang="ru-RU"/>
-          </a:p>
-        </p:txBody>
-      </p:sp>
-      <p:sp>
-        <p:nvSpPr>
-          <p:cNvPr id="12" name="Овал 11">
-            <a:extLst>
-              <a:ext uri="{FF2B5EF4-FFF2-40B4-BE49-F238E27FC236}">
-                <a16:creationId xmlns:a16="http://schemas.microsoft.com/office/drawing/2014/main" id="{429C1C95-A94E-E5B6-D8A4-4E5C9326E7AC}"/>
-              </a:ext>
-            </a:extLst>
-          </p:cNvPr>
-          <p:cNvSpPr/>
-          <p:nvPr/>
-        </p:nvSpPr>
-        <p:spPr>
-          <a:xfrm>
-            <a:off x="4723796" y="3972698"/>
-            <a:ext cx="210065" cy="210065"/>
-          </a:xfrm>
-          <a:prstGeom prst="ellipse">
-            <a:avLst/>
-          </a:prstGeom>
-          <a:solidFill>
-            <a:schemeClr val="bg2">
-              <a:lumMod val="75000"/>
-            </a:schemeClr>
-          </a:solidFill>
-          <a:ln>
-            <a:solidFill>
-              <a:schemeClr val="tx1">
-                <a:lumMod val="95000"/>
-                <a:lumOff val="5000"/>
-              </a:schemeClr>
-            </a:solidFill>
-          </a:ln>
-        </p:spPr>
-        <p:style>
-          <a:lnRef idx="2">
-            <a:schemeClr val="accent1">
-              <a:shade val="15000"/>
-            </a:schemeClr>
-          </a:lnRef>
-          <a:fillRef idx="1">
-            <a:schemeClr val="accent1"/>
-          </a:fillRef>
-          <a:effectRef idx="0">
-            <a:schemeClr val="accent1"/>
-          </a:effectRef>
-          <a:fontRef idx="minor">
-            <a:schemeClr val="lt1"/>
-          </a:fontRef>
-        </p:style>
-        <p:txBody>
-          <a:bodyPr rtlCol="0" anchor="ctr"/>
-          <a:lstStyle/>
-          <a:p>
-            <a:pPr algn="ctr"/>
-            <a:endParaRPr lang="ru-RU"/>
-          </a:p>
-        </p:txBody>
-      </p:sp>
-      <p:sp>
-        <p:nvSpPr>
-          <p:cNvPr id="13" name="Овал 12">
-            <a:extLst>
-              <a:ext uri="{FF2B5EF4-FFF2-40B4-BE49-F238E27FC236}">
-                <a16:creationId xmlns:a16="http://schemas.microsoft.com/office/drawing/2014/main" id="{3EA37454-C7C1-EF56-7736-6193E0BB7ADA}"/>
-              </a:ext>
-            </a:extLst>
-          </p:cNvPr>
-          <p:cNvSpPr/>
-          <p:nvPr/>
-        </p:nvSpPr>
-        <p:spPr>
-          <a:xfrm>
-            <a:off x="6726558" y="3972699"/>
-            <a:ext cx="210065" cy="210065"/>
-          </a:xfrm>
-          <a:prstGeom prst="ellipse">
-            <a:avLst/>
-          </a:prstGeom>
-          <a:solidFill>
-            <a:schemeClr val="bg2">
-              <a:lumMod val="75000"/>
-            </a:schemeClr>
-          </a:solidFill>
-          <a:ln>
-            <a:solidFill>
-              <a:schemeClr val="tx1">
-                <a:lumMod val="95000"/>
-                <a:lumOff val="5000"/>
-              </a:schemeClr>
-            </a:solidFill>
-          </a:ln>
-        </p:spPr>
-        <p:style>
-          <a:lnRef idx="2">
-            <a:schemeClr val="accent1">
-              <a:shade val="15000"/>
-            </a:schemeClr>
-          </a:lnRef>
-          <a:fillRef idx="1">
-            <a:schemeClr val="accent1"/>
-          </a:fillRef>
-          <a:effectRef idx="0">
-            <a:schemeClr val="accent1"/>
-          </a:effectRef>
-          <a:fontRef idx="minor">
-            <a:schemeClr val="lt1"/>
-          </a:fontRef>
-        </p:style>
-        <p:txBody>
-          <a:bodyPr rtlCol="0" anchor="ctr"/>
-          <a:lstStyle/>
-          <a:p>
-            <a:pPr algn="ctr"/>
-            <a:endParaRPr lang="ru-RU"/>
-          </a:p>
-        </p:txBody>
-      </p:sp>
-      <p:sp>
-        <p:nvSpPr>
-          <p:cNvPr id="14" name="Овал 13">
-            <a:extLst>
-              <a:ext uri="{FF2B5EF4-FFF2-40B4-BE49-F238E27FC236}">
-                <a16:creationId xmlns:a16="http://schemas.microsoft.com/office/drawing/2014/main" id="{94900891-A796-B462-2E54-F2D7B9C8D087}"/>
-              </a:ext>
-            </a:extLst>
-          </p:cNvPr>
-          <p:cNvSpPr/>
-          <p:nvPr/>
-        </p:nvSpPr>
-        <p:spPr>
-          <a:xfrm>
-            <a:off x="5725177" y="4621429"/>
-            <a:ext cx="210065" cy="210065"/>
-          </a:xfrm>
-          <a:prstGeom prst="ellipse">
-            <a:avLst/>
-          </a:prstGeom>
-          <a:solidFill>
-            <a:schemeClr val="bg2">
-              <a:lumMod val="75000"/>
-            </a:schemeClr>
-          </a:solidFill>
-          <a:ln>
-            <a:solidFill>
-              <a:schemeClr val="tx1">
-                <a:lumMod val="95000"/>
-                <a:lumOff val="5000"/>
-              </a:schemeClr>
-            </a:solidFill>
-          </a:ln>
-        </p:spPr>
-        <p:style>
-          <a:lnRef idx="2">
-            <a:schemeClr val="accent1">
-              <a:shade val="15000"/>
-            </a:schemeClr>
-          </a:lnRef>
-          <a:fillRef idx="1">
-            <a:schemeClr val="accent1"/>
-          </a:fillRef>
-          <a:effectRef idx="0">
-            <a:schemeClr val="accent1"/>
-          </a:effectRef>
-          <a:fontRef idx="minor">
-            <a:schemeClr val="lt1"/>
-          </a:fontRef>
-        </p:style>
-        <p:txBody>
-          <a:bodyPr rtlCol="0" anchor="ctr"/>
-          <a:lstStyle/>
-          <a:p>
-            <a:pPr algn="ctr"/>
-            <a:endParaRPr lang="ru-RU"/>
-          </a:p>
-        </p:txBody>
-      </p:sp>
-      <p:sp>
-        <p:nvSpPr>
-          <p:cNvPr id="15" name="Овал 14">
-            <a:extLst>
-              <a:ext uri="{FF2B5EF4-FFF2-40B4-BE49-F238E27FC236}">
-                <a16:creationId xmlns:a16="http://schemas.microsoft.com/office/drawing/2014/main" id="{C085BBDF-308F-DFB1-AFDE-FBF75BC1DD83}"/>
-              </a:ext>
-            </a:extLst>
-          </p:cNvPr>
-          <p:cNvSpPr/>
-          <p:nvPr/>
-        </p:nvSpPr>
-        <p:spPr>
-          <a:xfrm>
-            <a:off x="4723796" y="4621429"/>
-            <a:ext cx="210065" cy="210065"/>
-          </a:xfrm>
-          <a:prstGeom prst="ellipse">
-            <a:avLst/>
-          </a:prstGeom>
-          <a:solidFill>
-            <a:schemeClr val="bg2">
-              <a:lumMod val="75000"/>
-            </a:schemeClr>
-          </a:solidFill>
-          <a:ln>
-            <a:solidFill>
-              <a:schemeClr val="tx1">
-                <a:lumMod val="95000"/>
-                <a:lumOff val="5000"/>
-              </a:schemeClr>
-            </a:solidFill>
-          </a:ln>
-        </p:spPr>
-        <p:style>
-          <a:lnRef idx="2">
-            <a:schemeClr val="accent1">
-              <a:shade val="15000"/>
-            </a:schemeClr>
-          </a:lnRef>
-          <a:fillRef idx="1">
-            <a:schemeClr val="accent1"/>
-          </a:fillRef>
-          <a:effectRef idx="0">
-            <a:schemeClr val="accent1"/>
-          </a:effectRef>
-          <a:fontRef idx="minor">
-            <a:schemeClr val="lt1"/>
-          </a:fontRef>
-        </p:style>
-        <p:txBody>
-          <a:bodyPr rtlCol="0" anchor="ctr"/>
-          <a:lstStyle/>
-          <a:p>
-            <a:pPr algn="ctr"/>
-            <a:endParaRPr lang="ru-RU"/>
-          </a:p>
-        </p:txBody>
-      </p:sp>
-      <p:sp>
-        <p:nvSpPr>
-          <p:cNvPr id="16" name="Овал 15">
-            <a:extLst>
-              <a:ext uri="{FF2B5EF4-FFF2-40B4-BE49-F238E27FC236}">
-                <a16:creationId xmlns:a16="http://schemas.microsoft.com/office/drawing/2014/main" id="{C03B6B4C-76A4-ECB7-9979-2B60933D837A}"/>
-              </a:ext>
-            </a:extLst>
-          </p:cNvPr>
-          <p:cNvSpPr/>
-          <p:nvPr/>
-        </p:nvSpPr>
-        <p:spPr>
-          <a:xfrm>
-            <a:off x="6726558" y="4621430"/>
-            <a:ext cx="210065" cy="210065"/>
-          </a:xfrm>
-          <a:prstGeom prst="ellipse">
-            <a:avLst/>
-          </a:prstGeom>
-          <a:solidFill>
-            <a:schemeClr val="bg2">
-              <a:lumMod val="75000"/>
-            </a:schemeClr>
-          </a:solidFill>
-          <a:ln>
-            <a:solidFill>
-              <a:schemeClr val="tx1">
-                <a:lumMod val="95000"/>
-                <a:lumOff val="5000"/>
-              </a:schemeClr>
-            </a:solidFill>
-          </a:ln>
-        </p:spPr>
-        <p:style>
-          <a:lnRef idx="2">
-            <a:schemeClr val="accent1">
-              <a:shade val="15000"/>
-            </a:schemeClr>
-          </a:lnRef>
-          <a:fillRef idx="1">
-            <a:schemeClr val="accent1"/>
-          </a:fillRef>
-          <a:effectRef idx="0">
-            <a:schemeClr val="accent1"/>
-          </a:effectRef>
-          <a:fontRef idx="minor">
-            <a:schemeClr val="lt1"/>
-          </a:fontRef>
-        </p:style>
-        <p:txBody>
-          <a:bodyPr rtlCol="0" anchor="ctr"/>
-          <a:lstStyle/>
-          <a:p>
-            <a:pPr algn="ctr"/>
-            <a:endParaRPr lang="ru-RU"/>
-          </a:p>
-        </p:txBody>
-      </p:sp>
-      <p:sp>
-        <p:nvSpPr>
-          <p:cNvPr id="17" name="Прямоугольник 16">
-            <a:extLst>
-              <a:ext uri="{FF2B5EF4-FFF2-40B4-BE49-F238E27FC236}">
-                <a16:creationId xmlns:a16="http://schemas.microsoft.com/office/drawing/2014/main" id="{512EBC4D-A19A-F223-FF7B-07D6A60259B7}"/>
-              </a:ext>
-            </a:extLst>
-          </p:cNvPr>
-          <p:cNvSpPr/>
-          <p:nvPr/>
-        </p:nvSpPr>
-        <p:spPr>
-          <a:xfrm>
-            <a:off x="4511489" y="2366682"/>
-            <a:ext cx="625288" cy="2736477"/>
-          </a:xfrm>
-          <a:prstGeom prst="rect">
-            <a:avLst/>
-          </a:prstGeom>
-          <a:solidFill>
-            <a:srgbClr val="1C777C">
-              <a:alpha val="20000"/>
-            </a:srgbClr>
-          </a:solidFill>
-          <a:ln>
-            <a:solidFill>
-              <a:srgbClr val="1C777C"/>
-            </a:solidFill>
-          </a:ln>
-        </p:spPr>
-        <p:style>
-          <a:lnRef idx="2">
-            <a:schemeClr val="accent1">
-              <a:shade val="15000"/>
-            </a:schemeClr>
-          </a:lnRef>
-          <a:fillRef idx="1">
-            <a:schemeClr val="accent1"/>
-          </a:fillRef>
-          <a:effectRef idx="0">
-            <a:schemeClr val="accent1"/>
-          </a:effectRef>
-          <a:fontRef idx="minor">
-            <a:schemeClr val="lt1"/>
-          </a:fontRef>
-        </p:style>
-        <p:txBody>
-          <a:bodyPr rtlCol="0" anchor="ctr"/>
-          <a:lstStyle/>
-          <a:p>
-            <a:pPr algn="ctr"/>
-            <a:endParaRPr lang="ru-RU"/>
-          </a:p>
-        </p:txBody>
-      </p:sp>
-      <p:sp>
-        <p:nvSpPr>
-          <p:cNvPr id="18" name="Прямоугольник 17">
-            <a:extLst>
-              <a:ext uri="{FF2B5EF4-FFF2-40B4-BE49-F238E27FC236}">
-                <a16:creationId xmlns:a16="http://schemas.microsoft.com/office/drawing/2014/main" id="{1B5E0E7F-74A1-47E3-BC82-0C39ECC6B976}"/>
-              </a:ext>
-            </a:extLst>
-          </p:cNvPr>
-          <p:cNvSpPr/>
-          <p:nvPr/>
-        </p:nvSpPr>
-        <p:spPr>
-          <a:xfrm>
-            <a:off x="5517565" y="2366682"/>
-            <a:ext cx="625288" cy="2736477"/>
-          </a:xfrm>
-          <a:prstGeom prst="rect">
-            <a:avLst/>
-          </a:prstGeom>
-          <a:solidFill>
-            <a:schemeClr val="accent5">
-              <a:lumMod val="60000"/>
-              <a:lumOff val="40000"/>
-              <a:alpha val="20000"/>
-            </a:schemeClr>
-          </a:solidFill>
-          <a:ln>
-            <a:solidFill>
-              <a:schemeClr val="accent5">
-                <a:lumMod val="60000"/>
-                <a:lumOff val="40000"/>
-              </a:schemeClr>
-            </a:solidFill>
-          </a:ln>
-        </p:spPr>
-        <p:style>
-          <a:lnRef idx="2">
-            <a:schemeClr val="accent1">
-              <a:shade val="15000"/>
-            </a:schemeClr>
-          </a:lnRef>
-          <a:fillRef idx="1">
-            <a:schemeClr val="accent1"/>
-          </a:fillRef>
-          <a:effectRef idx="0">
-            <a:schemeClr val="accent1"/>
-          </a:effectRef>
-          <a:fontRef idx="minor">
-            <a:schemeClr val="lt1"/>
-          </a:fontRef>
-        </p:style>
-        <p:txBody>
-          <a:bodyPr rtlCol="0" anchor="ctr"/>
-          <a:lstStyle/>
-          <a:p>
-            <a:pPr algn="ctr"/>
-            <a:endParaRPr lang="ru-RU"/>
-          </a:p>
-        </p:txBody>
-      </p:sp>
-      <p:sp>
-        <p:nvSpPr>
-          <p:cNvPr id="19" name="Прямоугольник 18">
-            <a:extLst>
-              <a:ext uri="{FF2B5EF4-FFF2-40B4-BE49-F238E27FC236}">
-                <a16:creationId xmlns:a16="http://schemas.microsoft.com/office/drawing/2014/main" id="{C00ECBD3-29B2-F4AD-97F0-E474262D4573}"/>
-              </a:ext>
-            </a:extLst>
-          </p:cNvPr>
-          <p:cNvSpPr/>
-          <p:nvPr/>
-        </p:nvSpPr>
-        <p:spPr>
-          <a:xfrm>
-            <a:off x="6523641" y="2366681"/>
-            <a:ext cx="625288" cy="2736477"/>
-          </a:xfrm>
-          <a:prstGeom prst="rect">
-            <a:avLst/>
-          </a:prstGeom>
-          <a:solidFill>
-            <a:srgbClr val="002060">
-              <a:alpha val="20000"/>
-            </a:srgbClr>
-          </a:solidFill>
-          <a:ln>
-            <a:solidFill>
-              <a:srgbClr val="0070C0"/>
-            </a:solidFill>
-          </a:ln>
-        </p:spPr>
-        <p:style>
-          <a:lnRef idx="2">
-            <a:schemeClr val="accent1">
-              <a:shade val="15000"/>
-            </a:schemeClr>
-          </a:lnRef>
-          <a:fillRef idx="1">
-            <a:schemeClr val="accent1"/>
-          </a:fillRef>
-          <a:effectRef idx="0">
-            <a:schemeClr val="accent1"/>
-          </a:effectRef>
-          <a:fontRef idx="minor">
-            <a:schemeClr val="lt1"/>
-          </a:fontRef>
-        </p:style>
-        <p:txBody>
-          <a:bodyPr rtlCol="0" anchor="ctr"/>
-          <a:lstStyle/>
-          <a:p>
-            <a:pPr algn="ctr"/>
-            <a:endParaRPr lang="ru-RU"/>
-          </a:p>
-        </p:txBody>
-      </p:sp>
-      <p:sp>
-        <p:nvSpPr>
-          <p:cNvPr id="20" name="Прямоугольник 19">
-            <a:extLst>
-              <a:ext uri="{FF2B5EF4-FFF2-40B4-BE49-F238E27FC236}">
-                <a16:creationId xmlns:a16="http://schemas.microsoft.com/office/drawing/2014/main" id="{7A5370BB-3BFA-5039-A3AA-C0FF79D8B4D9}"/>
-              </a:ext>
-            </a:extLst>
-          </p:cNvPr>
-          <p:cNvSpPr/>
-          <p:nvPr/>
-        </p:nvSpPr>
-        <p:spPr>
-          <a:xfrm>
-            <a:off x="4294594" y="2502700"/>
-            <a:ext cx="2016741" cy="1198334"/>
-          </a:xfrm>
-          <a:prstGeom prst="rect">
-            <a:avLst/>
-          </a:prstGeom>
-          <a:solidFill>
-            <a:schemeClr val="tx1">
-              <a:lumMod val="75000"/>
-              <a:lumOff val="25000"/>
-              <a:alpha val="20000"/>
-            </a:schemeClr>
-          </a:solidFill>
-          <a:ln>
-            <a:noFill/>
-          </a:ln>
-        </p:spPr>
-        <p:style>
-          <a:lnRef idx="2">
-            <a:schemeClr val="accent1">
-              <a:shade val="15000"/>
-            </a:schemeClr>
-          </a:lnRef>
-          <a:fillRef idx="1">
-            <a:schemeClr val="accent1"/>
-          </a:fillRef>
-          <a:effectRef idx="0">
-            <a:schemeClr val="accent1"/>
-          </a:effectRef>
-          <a:fontRef idx="minor">
-            <a:schemeClr val="lt1"/>
-          </a:fontRef>
-        </p:style>
-        <p:txBody>
-          <a:bodyPr rtlCol="0" anchor="ctr"/>
-          <a:lstStyle/>
-          <a:p>
-            <a:pPr algn="ctr"/>
-            <a:endParaRPr lang="ru-RU"/>
-          </a:p>
-        </p:txBody>
-      </p:sp>
-      <p:sp>
-        <p:nvSpPr>
-          <p:cNvPr id="22" name="Прямоугольник 21">
-            <a:extLst>
-              <a:ext uri="{FF2B5EF4-FFF2-40B4-BE49-F238E27FC236}">
-                <a16:creationId xmlns:a16="http://schemas.microsoft.com/office/drawing/2014/main" id="{ADBF5C4E-FA24-E19D-DC4A-0DB03B4296C0}"/>
-              </a:ext>
-            </a:extLst>
-          </p:cNvPr>
-          <p:cNvSpPr/>
-          <p:nvPr/>
-        </p:nvSpPr>
-        <p:spPr>
-          <a:xfrm>
-            <a:off x="5399729" y="3085100"/>
-            <a:ext cx="916302" cy="1198334"/>
-          </a:xfrm>
-          <a:prstGeom prst="rect">
-            <a:avLst/>
-          </a:prstGeom>
-          <a:solidFill>
-            <a:schemeClr val="tx1">
-              <a:lumMod val="75000"/>
-              <a:lumOff val="25000"/>
-              <a:alpha val="20000"/>
-            </a:schemeClr>
-          </a:solidFill>
-          <a:ln>
-            <a:noFill/>
-          </a:ln>
-        </p:spPr>
-        <p:style>
-          <a:lnRef idx="2">
-            <a:schemeClr val="accent1">
-              <a:shade val="15000"/>
-            </a:schemeClr>
-          </a:lnRef>
-          <a:fillRef idx="1">
-            <a:schemeClr val="accent1"/>
-          </a:fillRef>
-          <a:effectRef idx="0">
-            <a:schemeClr val="accent1"/>
-          </a:effectRef>
-          <a:fontRef idx="minor">
-            <a:schemeClr val="lt1"/>
-          </a:fontRef>
-        </p:style>
-        <p:txBody>
-          <a:bodyPr rtlCol="0" anchor="ctr"/>
-          <a:lstStyle/>
-          <a:p>
-            <a:pPr algn="ctr"/>
-            <a:endParaRPr lang="ru-RU"/>
-          </a:p>
-        </p:txBody>
-      </p:sp>
-      <p:sp>
-        <p:nvSpPr>
-          <p:cNvPr id="23" name="Прямоугольник 22">
-            <a:extLst>
-              <a:ext uri="{FF2B5EF4-FFF2-40B4-BE49-F238E27FC236}">
-                <a16:creationId xmlns:a16="http://schemas.microsoft.com/office/drawing/2014/main" id="{B4BFBB6C-BB03-26C8-AF6B-44119DE96DCC}"/>
-              </a:ext>
-            </a:extLst>
-          </p:cNvPr>
-          <p:cNvSpPr/>
-          <p:nvPr/>
-        </p:nvSpPr>
-        <p:spPr>
-          <a:xfrm>
-            <a:off x="6314002" y="3085100"/>
-            <a:ext cx="1001198" cy="615934"/>
-          </a:xfrm>
-          <a:prstGeom prst="rect">
-            <a:avLst/>
-          </a:prstGeom>
-          <a:solidFill>
-            <a:schemeClr val="tx1">
-              <a:lumMod val="75000"/>
-              <a:lumOff val="25000"/>
-              <a:alpha val="20000"/>
-            </a:schemeClr>
-          </a:solidFill>
-          <a:ln>
-            <a:noFill/>
-          </a:ln>
-        </p:spPr>
-        <p:style>
-          <a:lnRef idx="2">
-            <a:schemeClr val="accent1">
-              <a:shade val="15000"/>
-            </a:schemeClr>
-          </a:lnRef>
-          <a:fillRef idx="1">
-            <a:schemeClr val="accent1"/>
-          </a:fillRef>
-          <a:effectRef idx="0">
-            <a:schemeClr val="accent1"/>
-          </a:effectRef>
-          <a:fontRef idx="minor">
-            <a:schemeClr val="lt1"/>
-          </a:fontRef>
-        </p:style>
-        <p:txBody>
-          <a:bodyPr rtlCol="0" anchor="ctr"/>
-          <a:lstStyle/>
-          <a:p>
-            <a:pPr algn="ctr"/>
-            <a:endParaRPr lang="ru-RU"/>
-          </a:p>
-        </p:txBody>
-      </p:sp>
-      <p:sp>
-        <p:nvSpPr>
-          <p:cNvPr id="25" name="Прямоугольник 24">
-            <a:extLst>
-              <a:ext uri="{FF2B5EF4-FFF2-40B4-BE49-F238E27FC236}">
-                <a16:creationId xmlns:a16="http://schemas.microsoft.com/office/drawing/2014/main" id="{42919883-C3E9-CC88-1E57-C24D25E01245}"/>
-              </a:ext>
-            </a:extLst>
-          </p:cNvPr>
-          <p:cNvSpPr/>
-          <p:nvPr/>
-        </p:nvSpPr>
-        <p:spPr>
-          <a:xfrm>
-            <a:off x="6394472" y="2502699"/>
-            <a:ext cx="920728" cy="505855"/>
-          </a:xfrm>
-          <a:prstGeom prst="rect">
-            <a:avLst/>
-          </a:prstGeom>
-          <a:solidFill>
-            <a:schemeClr val="tx1">
-              <a:lumMod val="75000"/>
-              <a:lumOff val="25000"/>
-              <a:alpha val="20000"/>
-            </a:schemeClr>
-          </a:solidFill>
-          <a:ln>
-            <a:noFill/>
-          </a:ln>
-        </p:spPr>
-        <p:style>
-          <a:lnRef idx="2">
-            <a:schemeClr val="accent1">
-              <a:shade val="15000"/>
-            </a:schemeClr>
-          </a:lnRef>
-          <a:fillRef idx="1">
-            <a:schemeClr val="accent1"/>
-          </a:fillRef>
-          <a:effectRef idx="0">
-            <a:schemeClr val="accent1"/>
-          </a:effectRef>
-          <a:fontRef idx="minor">
-            <a:schemeClr val="lt1"/>
-          </a:fontRef>
-        </p:style>
-        <p:txBody>
-          <a:bodyPr rtlCol="0" anchor="ctr"/>
-          <a:lstStyle/>
-          <a:p>
-            <a:pPr algn="ctr"/>
-            <a:endParaRPr lang="ru-RU"/>
-          </a:p>
-        </p:txBody>
-      </p:sp>
-      <p:sp>
-        <p:nvSpPr>
-          <p:cNvPr id="26" name="Прямоугольник 25">
-            <a:extLst>
-              <a:ext uri="{FF2B5EF4-FFF2-40B4-BE49-F238E27FC236}">
-                <a16:creationId xmlns:a16="http://schemas.microsoft.com/office/drawing/2014/main" id="{04C0AB78-A195-E6AC-14A4-D0E6B31FB750}"/>
-              </a:ext>
-            </a:extLst>
-          </p:cNvPr>
-          <p:cNvSpPr/>
-          <p:nvPr/>
-        </p:nvSpPr>
-        <p:spPr>
-          <a:xfrm>
-            <a:off x="4294594" y="3759455"/>
-            <a:ext cx="3020606" cy="531159"/>
-          </a:xfrm>
-          <a:prstGeom prst="rect">
-            <a:avLst/>
-          </a:prstGeom>
-          <a:solidFill>
-            <a:schemeClr val="tx1">
-              <a:lumMod val="75000"/>
-              <a:lumOff val="25000"/>
-              <a:alpha val="20000"/>
-            </a:schemeClr>
-          </a:solidFill>
-          <a:ln>
-            <a:noFill/>
-          </a:ln>
-        </p:spPr>
-        <p:style>
-          <a:lnRef idx="2">
-            <a:schemeClr val="accent1">
-              <a:shade val="15000"/>
-            </a:schemeClr>
-          </a:lnRef>
-          <a:fillRef idx="1">
-            <a:schemeClr val="accent1"/>
-          </a:fillRef>
-          <a:effectRef idx="0">
-            <a:schemeClr val="accent1"/>
-          </a:effectRef>
-          <a:fontRef idx="minor">
-            <a:schemeClr val="lt1"/>
-          </a:fontRef>
-        </p:style>
-        <p:txBody>
-          <a:bodyPr rtlCol="0" anchor="ctr"/>
-          <a:lstStyle/>
-          <a:p>
-            <a:pPr algn="ctr"/>
-            <a:endParaRPr lang="ru-RU"/>
-          </a:p>
-        </p:txBody>
-      </p:sp>
-      <p:sp>
-        <p:nvSpPr>
-          <p:cNvPr id="21" name="Заголовок 1">
-            <a:extLst>
-              <a:ext uri="{FF2B5EF4-FFF2-40B4-BE49-F238E27FC236}">
-                <a16:creationId xmlns:a16="http://schemas.microsoft.com/office/drawing/2014/main" id="{C0EBD24A-7F31-8971-4D22-B009549423CC}"/>
-              </a:ext>
-            </a:extLst>
-          </p:cNvPr>
-          <p:cNvSpPr txBox="1">
-            <a:spLocks/>
-          </p:cNvSpPr>
-          <p:nvPr/>
-        </p:nvSpPr>
-        <p:spPr>
-          <a:xfrm>
-            <a:off x="1055688" y="728664"/>
-            <a:ext cx="10080625" cy="705690"/>
-          </a:xfrm>
-          <a:prstGeom prst="rect">
-            <a:avLst/>
-          </a:prstGeom>
-        </p:spPr>
-        <p:txBody>
-          <a:bodyPr vert="horz" lIns="91440" tIns="45720" rIns="91440" bIns="45720" rtlCol="0" anchor="ctr">
-            <a:normAutofit/>
-          </a:bodyPr>
-          <a:lstStyle>
-            <a:lvl1pPr algn="l" defTabSz="914400" rtl="0" eaLnBrk="1" latinLnBrk="0" hangingPunct="1">
-              <a:lnSpc>
-                <a:spcPct val="90000"/>
-              </a:lnSpc>
-              <a:spcBef>
-                <a:spcPct val="0"/>
-              </a:spcBef>
-              <a:buNone/>
-              <a:defRPr sz="4400" kern="1200">
-                <a:solidFill>
-                  <a:schemeClr val="tx1"/>
-                </a:solidFill>
-                <a:latin typeface="+mj-lt"/>
-                <a:ea typeface="+mj-ea"/>
-                <a:cs typeface="+mj-cs"/>
-              </a:defRPr>
-            </a:lvl1pPr>
-          </a:lstStyle>
-          <a:p>
-            <a:r>
-              <a:rPr lang="ru-RU"/>
-              <a:t>Минимальное покрытие множеств</a:t>
-            </a:r>
-            <a:endParaRPr lang="ru-RU" dirty="0"/>
-          </a:p>
-        </p:txBody>
-      </p:sp>
-    </p:spTree>
-    <p:extLst>
-      <p:ext uri="{BB962C8B-B14F-4D97-AF65-F5344CB8AC3E}">
-        <p14:creationId xmlns:p14="http://schemas.microsoft.com/office/powerpoint/2010/main" val="1604028254"/>
-      </p:ext>
-    </p:extLst>
-  </p:cSld>
-  <p:clrMapOvr>
-    <a:masterClrMapping/>
-  </p:clrMapOvr>
-</p:sld>
-</file>
-
-<file path=ppt/slides/slide16.xml><?xml version="1.0" encoding="utf-8"?>
-<p:sld xmlns:a="http://schemas.openxmlformats.org/drawingml/2006/main" xmlns:r="http://schemas.openxmlformats.org/officeDocument/2006/relationships" xmlns:p="http://schemas.openxmlformats.org/presentationml/2006/main">
-  <p:cSld>
-    <p:spTree>
-      <p:nvGrpSpPr>
-        <p:cNvPr id="1" name=""/>
-        <p:cNvGrpSpPr/>
-        <p:nvPr/>
-      </p:nvGrpSpPr>
-      <p:grpSpPr>
-        <a:xfrm>
-          <a:off x="0" y="0"/>
-          <a:ext cx="0" cy="0"/>
-          <a:chOff x="0" y="0"/>
-          <a:chExt cx="0" cy="0"/>
-        </a:xfrm>
-      </p:grpSpPr>
-      <p:sp>
-        <p:nvSpPr>
-          <p:cNvPr id="2" name="Заголовок 1">
-            <a:extLst>
-              <a:ext uri="{FF2B5EF4-FFF2-40B4-BE49-F238E27FC236}">
-                <a16:creationId xmlns:a16="http://schemas.microsoft.com/office/drawing/2014/main" id="{0B9F9ED2-E623-F791-924E-5C5AE9C12D8F}"/>
-              </a:ext>
-            </a:extLst>
-          </p:cNvPr>
-          <p:cNvSpPr>
-            <a:spLocks noGrp="1"/>
-          </p:cNvSpPr>
-          <p:nvPr>
-            <p:ph type="title"/>
-          </p:nvPr>
-        </p:nvSpPr>
-        <p:spPr>
-          <a:xfrm>
-            <a:off x="1055688" y="728664"/>
-            <a:ext cx="10080625" cy="705690"/>
-          </a:xfrm>
-        </p:spPr>
-        <p:txBody>
-          <a:bodyPr/>
-          <a:lstStyle/>
-          <a:p>
-            <a:r>
-              <a:rPr lang="ru-RU" dirty="0"/>
-              <a:t>Минимальное покрытие множеств</a:t>
-            </a:r>
-          </a:p>
-        </p:txBody>
-      </p:sp>
-      <p:pic>
-        <p:nvPicPr>
-          <p:cNvPr id="6" name="Рисунок 5">
-            <a:extLst>
-              <a:ext uri="{FF2B5EF4-FFF2-40B4-BE49-F238E27FC236}">
-                <a16:creationId xmlns:a16="http://schemas.microsoft.com/office/drawing/2014/main" id="{20607CDB-7A65-6793-FB7D-D847ABBB7E02}"/>
-              </a:ext>
-            </a:extLst>
-          </p:cNvPr>
-          <p:cNvPicPr>
-            <a:picLocks noChangeAspect="1"/>
-          </p:cNvPicPr>
-          <p:nvPr/>
-        </p:nvPicPr>
-        <p:blipFill>
-          <a:blip r:embed="rId2">
-            <a:extLst>
-              <a:ext uri="{28A0092B-C50C-407E-A947-70E740481C1C}">
-                <a14:useLocalDpi xmlns:a14="http://schemas.microsoft.com/office/drawing/2010/main" val="0"/>
-              </a:ext>
-            </a:extLst>
-          </a:blip>
-          <a:stretch>
-            <a:fillRect/>
-          </a:stretch>
-        </p:blipFill>
-        <p:spPr>
-          <a:xfrm>
-            <a:off x="177217" y="1852272"/>
-            <a:ext cx="4376855" cy="4014923"/>
-          </a:xfrm>
-          <a:prstGeom prst="rect">
-            <a:avLst/>
-          </a:prstGeom>
-        </p:spPr>
-      </p:pic>
-      <p:pic>
-        <p:nvPicPr>
-          <p:cNvPr id="24" name="Рисунок 23">
-            <a:extLst>
-              <a:ext uri="{FF2B5EF4-FFF2-40B4-BE49-F238E27FC236}">
-                <a16:creationId xmlns:a16="http://schemas.microsoft.com/office/drawing/2014/main" id="{14F109AA-7823-C74F-9253-EFBDB8869142}"/>
-              </a:ext>
-            </a:extLst>
-          </p:cNvPr>
-          <p:cNvPicPr>
-            <a:picLocks noChangeAspect="1"/>
-          </p:cNvPicPr>
-          <p:nvPr/>
-        </p:nvPicPr>
-        <p:blipFill>
-          <a:blip r:embed="rId3">
-            <a:extLst>
-              <a:ext uri="{28A0092B-C50C-407E-A947-70E740481C1C}">
-                <a14:useLocalDpi xmlns:a14="http://schemas.microsoft.com/office/drawing/2010/main" val="0"/>
-              </a:ext>
-            </a:extLst>
-          </a:blip>
-          <a:stretch>
-            <a:fillRect/>
-          </a:stretch>
-        </p:blipFill>
-        <p:spPr>
-          <a:xfrm>
-            <a:off x="3935413" y="1882892"/>
-            <a:ext cx="3717781" cy="3768594"/>
-          </a:xfrm>
-          <a:prstGeom prst="rect">
-            <a:avLst/>
-          </a:prstGeom>
-        </p:spPr>
-      </p:pic>
-      <p:pic>
-        <p:nvPicPr>
-          <p:cNvPr id="30" name="Рисунок 29">
-            <a:extLst>
-              <a:ext uri="{FF2B5EF4-FFF2-40B4-BE49-F238E27FC236}">
-                <a16:creationId xmlns:a16="http://schemas.microsoft.com/office/drawing/2014/main" id="{88C9D897-B0F7-2BDF-3FB0-3F33E9A0472C}"/>
-              </a:ext>
-            </a:extLst>
-          </p:cNvPr>
-          <p:cNvPicPr>
-            <a:picLocks noChangeAspect="1"/>
-          </p:cNvPicPr>
-          <p:nvPr/>
-        </p:nvPicPr>
-        <p:blipFill>
-          <a:blip r:embed="rId4">
-            <a:extLst>
-              <a:ext uri="{28A0092B-C50C-407E-A947-70E740481C1C}">
-                <a14:useLocalDpi xmlns:a14="http://schemas.microsoft.com/office/drawing/2010/main" val="0"/>
-              </a:ext>
-            </a:extLst>
-          </a:blip>
-          <a:stretch>
-            <a:fillRect/>
-          </a:stretch>
-        </p:blipFill>
-        <p:spPr>
-          <a:xfrm>
-            <a:off x="7418532" y="2005166"/>
-            <a:ext cx="3717781" cy="3709134"/>
-          </a:xfrm>
-          <a:prstGeom prst="rect">
-            <a:avLst/>
-          </a:prstGeom>
-        </p:spPr>
-      </p:pic>
-    </p:spTree>
-    <p:extLst>
-      <p:ext uri="{BB962C8B-B14F-4D97-AF65-F5344CB8AC3E}">
-        <p14:creationId xmlns:p14="http://schemas.microsoft.com/office/powerpoint/2010/main" val="155397901"/>
-      </p:ext>
-    </p:extLst>
-  </p:cSld>
-  <p:clrMapOvr>
-    <a:masterClrMapping/>
-  </p:clrMapOvr>
-</p:sld>
-</file>
-
-<file path=ppt/slides/slide17.xml><?xml version="1.0" encoding="utf-8"?>
-<p:sld xmlns:a="http://schemas.openxmlformats.org/drawingml/2006/main" xmlns:r="http://schemas.openxmlformats.org/officeDocument/2006/relationships" xmlns:p="http://schemas.openxmlformats.org/presentationml/2006/main">
-  <p:cSld>
-    <p:spTree>
-      <p:nvGrpSpPr>
-        <p:cNvPr id="1" name=""/>
-        <p:cNvGrpSpPr/>
-        <p:nvPr/>
-      </p:nvGrpSpPr>
-      <p:grpSpPr>
-        <a:xfrm>
-          <a:off x="0" y="0"/>
-          <a:ext cx="0" cy="0"/>
-          <a:chOff x="0" y="0"/>
-          <a:chExt cx="0" cy="0"/>
-        </a:xfrm>
-      </p:grpSpPr>
-      <p:sp>
-        <p:nvSpPr>
-          <p:cNvPr id="2" name="Заголовок 1">
-            <a:extLst>
-              <a:ext uri="{FF2B5EF4-FFF2-40B4-BE49-F238E27FC236}">
-                <a16:creationId xmlns:a16="http://schemas.microsoft.com/office/drawing/2014/main" id="{66EEB798-B493-F642-B997-2F7E13D6956A}"/>
-              </a:ext>
-            </a:extLst>
-          </p:cNvPr>
-          <p:cNvSpPr>
-            <a:spLocks noGrp="1"/>
-          </p:cNvSpPr>
-          <p:nvPr>
-            <p:ph type="title"/>
-          </p:nvPr>
-        </p:nvSpPr>
-        <p:spPr>
-          <a:xfrm>
-            <a:off x="1055688" y="728663"/>
-            <a:ext cx="10515600" cy="822231"/>
-          </a:xfrm>
-        </p:spPr>
-        <p:txBody>
-          <a:bodyPr>
-            <a:normAutofit/>
-          </a:bodyPr>
-          <a:lstStyle/>
-          <a:p>
-            <a:r>
-              <a:rPr lang="ru-RU" dirty="0"/>
-              <a:t>Сложность алгоритма</a:t>
-            </a:r>
-          </a:p>
-        </p:txBody>
-      </p:sp>
-      <p:pic>
-        <p:nvPicPr>
-          <p:cNvPr id="5" name="Объект 4" descr="Изображение выглядит как текст, снимок экрана, Шрифт, черно-белый&#10;&#10;Автоматически созданное описание">
-            <a:extLst>
-              <a:ext uri="{FF2B5EF4-FFF2-40B4-BE49-F238E27FC236}">
-                <a16:creationId xmlns:a16="http://schemas.microsoft.com/office/drawing/2014/main" id="{ED01682E-BD0E-47CA-FFB3-64CFEC2D8BAD}"/>
-              </a:ext>
-            </a:extLst>
-          </p:cNvPr>
-          <p:cNvPicPr>
-            <a:picLocks noGrp="1" noChangeAspect="1"/>
-          </p:cNvPicPr>
-          <p:nvPr>
-            <p:ph idx="1"/>
-          </p:nvPr>
-        </p:nvPicPr>
-        <p:blipFill>
-          <a:blip r:embed="rId2">
-            <a:extLst>
-              <a:ext uri="{28A0092B-C50C-407E-A947-70E740481C1C}">
-                <a14:useLocalDpi xmlns:a14="http://schemas.microsoft.com/office/drawing/2010/main" val="0"/>
-              </a:ext>
-            </a:extLst>
-          </a:blip>
-          <a:stretch>
-            <a:fillRect/>
-          </a:stretch>
-        </p:blipFill>
-        <p:spPr>
-          <a:xfrm>
-            <a:off x="2433578" y="1825625"/>
-            <a:ext cx="7324843" cy="4351338"/>
-          </a:xfrm>
-        </p:spPr>
-      </p:pic>
-    </p:spTree>
-    <p:extLst>
-      <p:ext uri="{BB962C8B-B14F-4D97-AF65-F5344CB8AC3E}">
-        <p14:creationId xmlns:p14="http://schemas.microsoft.com/office/powerpoint/2010/main" val="1017895864"/>
-      </p:ext>
-    </p:extLst>
-  </p:cSld>
-  <p:clrMapOvr>
-    <a:masterClrMapping/>
-  </p:clrMapOvr>
-</p:sld>
-</file>
-
-<file path=ppt/slides/slide18.xml><?xml version="1.0" encoding="utf-8"?>
-<p:sld xmlns:a="http://schemas.openxmlformats.org/drawingml/2006/main" xmlns:r="http://schemas.openxmlformats.org/officeDocument/2006/relationships" xmlns:p="http://schemas.openxmlformats.org/presentationml/2006/main">
-  <p:cSld>
-    <p:spTree>
-      <p:nvGrpSpPr>
-        <p:cNvPr id="1" name=""/>
-        <p:cNvGrpSpPr/>
-        <p:nvPr/>
-      </p:nvGrpSpPr>
-      <p:grpSpPr>
-        <a:xfrm>
-          <a:off x="0" y="0"/>
-          <a:ext cx="0" cy="0"/>
-          <a:chOff x="0" y="0"/>
-          <a:chExt cx="0" cy="0"/>
-        </a:xfrm>
-      </p:grpSpPr>
-      <mc:AlternateContent xmlns:mc="http://schemas.openxmlformats.org/markup-compatibility/2006" xmlns:a14="http://schemas.microsoft.com/office/drawing/2010/main">
-        <mc:Choice Requires="a14">
+      <mc:AlternateContent xmlns:mc="http://schemas.openxmlformats.org/markup-compatibility/2006">
+        <mc:Choice xmlns:a14="http://schemas.microsoft.com/office/drawing/2010/main" Requires="a14">
           <p:graphicFrame>
             <p:nvGraphicFramePr>
               <p:cNvPr id="4" name="Объект 3">
@@ -5832,11 +3717,6 @@
               </p:cNvGraphicFramePr>
               <p:nvPr>
                 <p:ph idx="1"/>
-                <p:extLst>
-                  <p:ext uri="{D42A27DB-BD31-4B8C-83A1-F6EECF244321}">
-                    <p14:modId xmlns:p14="http://schemas.microsoft.com/office/powerpoint/2010/main" val="2237904584"/>
-                  </p:ext>
-                </p:extLst>
               </p:nvPr>
             </p:nvGraphicFramePr>
             <p:xfrm>
@@ -5880,7 +3760,7 @@
                         <a:p>
                           <a:r>
                             <a:rPr lang="ru-RU" dirty="0"/>
-                            <a:t>Название алгоритма</a:t>
+                            <a:t>Автор алгоритма</a:t>
                           </a:r>
                         </a:p>
                       </a:txBody>
@@ -6052,8 +3932,24 @@
                         <a:p>
                           <a:r>
                             <a:rPr lang="ru-RU" dirty="0"/>
-                            <a:t>…</a:t>
+                            <a:t>Ефрат, </a:t>
                           </a:r>
+                          <a:r>
+                            <a:rPr lang="en-US" dirty="0"/>
+                            <a:t>H</a:t>
+                          </a:r>
+                          <a:r>
+                            <a:rPr lang="ru-RU" dirty="0"/>
+                            <a:t>ар-</a:t>
+                          </a:r>
+                          <a:r>
+                            <a:rPr lang="ru-RU" dirty="0" err="1"/>
+                            <a:t>Пелед</a:t>
+                          </a:r>
+                          <a:endParaRPr lang="ru-RU" dirty="0"/>
+                        </a:p>
+                        <a:p>
+                          <a:endParaRPr lang="ru-RU" dirty="0"/>
                         </a:p>
                       </a:txBody>
                       <a:tcPr>
@@ -6102,7 +3998,7 @@
                         <a:p>
                           <a:r>
                             <a:rPr lang="ru-RU" dirty="0"/>
-                            <a:t>Аппроксимационный </a:t>
+                            <a:t>Рандомизированная аппроксимация</a:t>
                           </a:r>
                         </a:p>
                       </a:txBody>
@@ -6151,10 +4047,132 @@
                         <a:lstStyle/>
                         <a:p>
                           <a:pPr algn="ctr"/>
-                          <a:r>
-                            <a:rPr lang="ru-RU" dirty="0"/>
-                            <a:t>?</a:t>
-                          </a:r>
+                          <a14:m>
+                            <m:oMathPara xmlns:m="http://schemas.openxmlformats.org/officeDocument/2006/math">
+                              <m:oMathParaPr>
+                                <m:jc m:val="centerGroup"/>
+                              </m:oMathParaPr>
+                              <m:oMath xmlns:m="http://schemas.openxmlformats.org/officeDocument/2006/math">
+                                <m:r>
+                                  <a:rPr lang="en-US" b="0" i="1" baseline="0" smtClean="0">
+                                    <a:latin typeface="Cambria Math" panose="02040503050406030204" pitchFamily="18" charset="0"/>
+                                  </a:rPr>
+                                  <m:t>𝑂</m:t>
+                                </m:r>
+                                <m:r>
+                                  <a:rPr lang="en-US" b="0" i="1" baseline="0" smtClean="0">
+                                    <a:latin typeface="Cambria Math" panose="02040503050406030204" pitchFamily="18" charset="0"/>
+                                  </a:rPr>
+                                  <m:t>(</m:t>
+                                </m:r>
+                                <m:r>
+                                  <a:rPr lang="en-US" b="0" i="1" baseline="0" smtClean="0">
+                                    <a:latin typeface="Cambria Math" panose="02040503050406030204" pitchFamily="18" charset="0"/>
+                                  </a:rPr>
+                                  <m:t>𝑛h</m:t>
+                                </m:r>
+                                <m:sSubSup>
+                                  <m:sSubSupPr>
+                                    <m:ctrlPr>
+                                      <a:rPr lang="en-US" b="0" i="1" baseline="0" smtClean="0">
+                                        <a:latin typeface="Cambria Math" panose="02040503050406030204" pitchFamily="18" charset="0"/>
+                                      </a:rPr>
+                                    </m:ctrlPr>
+                                  </m:sSubSupPr>
+                                  <m:e>
+                                    <m:r>
+                                      <a:rPr lang="en-US" b="0" i="1" baseline="0" smtClean="0">
+                                        <a:latin typeface="Cambria Math" panose="02040503050406030204" pitchFamily="18" charset="0"/>
+                                      </a:rPr>
+                                      <m:t>𝑐</m:t>
+                                    </m:r>
+                                  </m:e>
+                                  <m:sub>
+                                    <m:r>
+                                      <a:rPr lang="en-US" b="0" i="1" baseline="0" smtClean="0">
+                                        <a:latin typeface="Cambria Math" panose="02040503050406030204" pitchFamily="18" charset="0"/>
+                                      </a:rPr>
+                                      <m:t>𝑜𝑝𝑡</m:t>
+                                    </m:r>
+                                  </m:sub>
+                                  <m:sup>
+                                    <m:r>
+                                      <a:rPr lang="en-US" b="0" i="1" baseline="0" smtClean="0">
+                                        <a:latin typeface="Cambria Math" panose="02040503050406030204" pitchFamily="18" charset="0"/>
+                                      </a:rPr>
+                                      <m:t>3</m:t>
+                                    </m:r>
+                                  </m:sup>
+                                </m:sSubSup>
+                                <m:sSup>
+                                  <m:sSupPr>
+                                    <m:ctrlPr>
+                                      <a:rPr lang="en-US" b="0" i="1" baseline="0" smtClean="0">
+                                        <a:latin typeface="Cambria Math" panose="02040503050406030204" pitchFamily="18" charset="0"/>
+                                      </a:rPr>
+                                    </m:ctrlPr>
+                                  </m:sSupPr>
+                                  <m:e>
+                                    <m:r>
+                                      <a:rPr lang="en-US" b="0" i="1" baseline="0" smtClean="0">
+                                        <a:latin typeface="Cambria Math" panose="02040503050406030204" pitchFamily="18" charset="0"/>
+                                      </a:rPr>
+                                      <m:t>(</m:t>
+                                    </m:r>
+                                    <m:func>
+                                      <m:funcPr>
+                                        <m:ctrlPr>
+                                          <a:rPr lang="en-US" b="0" i="1" baseline="0" smtClean="0">
+                                            <a:latin typeface="Cambria Math" panose="02040503050406030204" pitchFamily="18" charset="0"/>
+                                          </a:rPr>
+                                        </m:ctrlPr>
+                                      </m:funcPr>
+                                      <m:fName>
+                                        <m:r>
+                                          <m:rPr>
+                                            <m:sty m:val="p"/>
+                                          </m:rPr>
+                                          <a:rPr lang="en-US" b="0" i="0" baseline="0" smtClean="0">
+                                            <a:latin typeface="Cambria Math" panose="02040503050406030204" pitchFamily="18" charset="0"/>
+                                          </a:rPr>
+                                          <m:t>log</m:t>
+                                        </m:r>
+                                      </m:fName>
+                                      <m:e>
+                                        <m:r>
+                                          <a:rPr lang="en-US" b="0" i="1" baseline="0" smtClean="0">
+                                            <a:latin typeface="Cambria Math" panose="02040503050406030204" pitchFamily="18" charset="0"/>
+                                          </a:rPr>
+                                          <m:t>𝑛</m:t>
+                                        </m:r>
+                                      </m:e>
+                                    </m:func>
+                                    <m:r>
+                                      <a:rPr lang="en-US" b="0" i="1" baseline="0" smtClean="0">
+                                        <a:latin typeface="Cambria Math" panose="02040503050406030204" pitchFamily="18" charset="0"/>
+                                      </a:rPr>
+                                      <m:t>)</m:t>
+                                    </m:r>
+                                  </m:e>
+                                  <m:sup>
+                                    <m:r>
+                                      <a:rPr lang="en-US" b="0" i="1" baseline="0" smtClean="0">
+                                        <a:latin typeface="Cambria Math" panose="02040503050406030204" pitchFamily="18" charset="0"/>
+                                      </a:rPr>
+                                      <m:t>𝑘</m:t>
+                                    </m:r>
+                                  </m:sup>
+                                </m:sSup>
+                                <m:r>
+                                  <a:rPr lang="en-US" b="0" i="1" baseline="0" smtClean="0">
+                                    <a:latin typeface="Cambria Math" panose="02040503050406030204" pitchFamily="18" charset="0"/>
+                                  </a:rPr>
+                                  <m:t>)</m:t>
+                                </m:r>
+                              </m:oMath>
+                            </m:oMathPara>
+                          </a14:m>
+                          <a:endParaRPr lang="ru-RU" baseline="0" dirty="0"/>
                         </a:p>
                       </a:txBody>
                       <a:tcPr>
@@ -6501,7 +4519,7 @@
             </a:graphic>
           </p:graphicFrame>
         </mc:Choice>
-        <mc:Fallback xmlns="">
+        <mc:Fallback>
           <p:graphicFrame>
             <p:nvGraphicFramePr>
               <p:cNvPr id="4" name="Объект 3">
@@ -6516,11 +4534,6 @@
               </p:cNvGraphicFramePr>
               <p:nvPr>
                 <p:ph idx="1"/>
-                <p:extLst>
-                  <p:ext uri="{D42A27DB-BD31-4B8C-83A1-F6EECF244321}">
-                    <p14:modId xmlns:p14="http://schemas.microsoft.com/office/powerpoint/2010/main" val="2237904584"/>
-                  </p:ext>
-                </p:extLst>
               </p:nvPr>
             </p:nvGraphicFramePr>
             <p:xfrm>
@@ -6564,7 +4577,7 @@
                         <a:p>
                           <a:r>
                             <a:rPr lang="ru-RU" dirty="0"/>
-                            <a:t>Название алгоритма</a:t>
+                            <a:t>Автор алгоритма</a:t>
                           </a:r>
                         </a:p>
                       </a:txBody>
@@ -6736,8 +4749,24 @@
                         <a:p>
                           <a:r>
                             <a:rPr lang="ru-RU" dirty="0"/>
-                            <a:t>…</a:t>
+                            <a:t>Ефрат, </a:t>
                           </a:r>
+                          <a:r>
+                            <a:rPr lang="en-US" dirty="0"/>
+                            <a:t>H</a:t>
+                          </a:r>
+                          <a:r>
+                            <a:rPr lang="ru-RU" dirty="0"/>
+                            <a:t>ар-</a:t>
+                          </a:r>
+                          <a:r>
+                            <a:rPr lang="ru-RU" dirty="0" err="1"/>
+                            <a:t>Пелед</a:t>
+                          </a:r>
+                          <a:endParaRPr lang="ru-RU" dirty="0"/>
+                        </a:p>
+                        <a:p>
+                          <a:endParaRPr lang="ru-RU" dirty="0"/>
                         </a:p>
                       </a:txBody>
                       <a:tcPr>
@@ -6786,7 +4815,7 @@
                         <a:p>
                           <a:r>
                             <a:rPr lang="ru-RU" dirty="0"/>
-                            <a:t>Аппроксимационный </a:t>
+                            <a:t>Рандомизированная аппроксимация</a:t>
                           </a:r>
                         </a:p>
                       </a:txBody>
@@ -6834,11 +4863,7 @@
                         <a:bodyPr/>
                         <a:lstStyle/>
                         <a:p>
-                          <a:pPr algn="ctr"/>
-                          <a:r>
-                            <a:rPr lang="ru-RU" dirty="0"/>
-                            <a:t>?</a:t>
-                          </a:r>
+                          <a:endParaRPr lang="ru-RU"/>
                         </a:p>
                       </a:txBody>
                       <a:tcPr>
@@ -6878,6 +4903,12 @@
                           <a:headEnd type="none" w="med" len="med"/>
                           <a:tailEnd type="none" w="med" len="med"/>
                         </a:lnB>
+                        <a:blipFill>
+                          <a:blip r:embed="rId2"/>
+                          <a:stretch>
+                            <a:fillRect l="-200000" t="-84112" r="-463" b="-82243"/>
+                          </a:stretch>
+                        </a:blipFill>
                       </a:tcPr>
                     </a:tc>
                     <a:extLst>
@@ -7109,7 +5140,2264 @@
     </p:spTree>
     <p:extLst>
       <p:ext uri="{BB962C8B-B14F-4D97-AF65-F5344CB8AC3E}">
-        <p14:creationId xmlns:p14="http://schemas.microsoft.com/office/powerpoint/2010/main" val="3065853032"/>
+        <p14:creationId xmlns:p14="http://schemas.microsoft.com/office/powerpoint/2010/main" val="3115599569"/>
+      </p:ext>
+    </p:extLst>
+  </p:cSld>
+  <p:clrMapOvr>
+    <a:masterClrMapping/>
+  </p:clrMapOvr>
+</p:sld>
+</file>
+
+<file path=ppt/slides/slide12.xml><?xml version="1.0" encoding="utf-8"?>
+<p:sld xmlns:a="http://schemas.openxmlformats.org/drawingml/2006/main" xmlns:r="http://schemas.openxmlformats.org/officeDocument/2006/relationships" xmlns:p="http://schemas.openxmlformats.org/presentationml/2006/main">
+  <p:cSld>
+    <p:spTree>
+      <p:nvGrpSpPr>
+        <p:cNvPr id="1" name=""/>
+        <p:cNvGrpSpPr/>
+        <p:nvPr/>
+      </p:nvGrpSpPr>
+      <p:grpSpPr>
+        <a:xfrm>
+          <a:off x="0" y="0"/>
+          <a:ext cx="0" cy="0"/>
+          <a:chOff x="0" y="0"/>
+          <a:chExt cx="0" cy="0"/>
+        </a:xfrm>
+      </p:grpSpPr>
+      <p:sp>
+        <p:nvSpPr>
+          <p:cNvPr id="2" name="Заголовок 1">
+            <a:extLst>
+              <a:ext uri="{FF2B5EF4-FFF2-40B4-BE49-F238E27FC236}">
+                <a16:creationId xmlns:a16="http://schemas.microsoft.com/office/drawing/2014/main" id="{66EEB798-B493-F642-B997-2F7E13D6956A}"/>
+              </a:ext>
+            </a:extLst>
+          </p:cNvPr>
+          <p:cNvSpPr>
+            <a:spLocks noGrp="1"/>
+          </p:cNvSpPr>
+          <p:nvPr>
+            <p:ph type="title"/>
+          </p:nvPr>
+        </p:nvSpPr>
+        <p:spPr>
+          <a:xfrm>
+            <a:off x="1055688" y="728663"/>
+            <a:ext cx="10515600" cy="822231"/>
+          </a:xfrm>
+        </p:spPr>
+        <p:txBody>
+          <a:bodyPr>
+            <a:normAutofit/>
+          </a:bodyPr>
+          <a:lstStyle/>
+          <a:p>
+            <a:r>
+              <a:rPr lang="ru-RU" dirty="0"/>
+              <a:t>Сложность алгоритма</a:t>
+            </a:r>
+          </a:p>
+        </p:txBody>
+      </p:sp>
+      <mc:AlternateContent xmlns:mc="http://schemas.openxmlformats.org/markup-compatibility/2006" xmlns:a14="http://schemas.microsoft.com/office/drawing/2010/main">
+        <mc:Choice Requires="a14">
+          <p:sp>
+            <p:nvSpPr>
+              <p:cNvPr id="4" name="Объект 3">
+                <a:extLst>
+                  <a:ext uri="{FF2B5EF4-FFF2-40B4-BE49-F238E27FC236}">
+                    <a16:creationId xmlns:a16="http://schemas.microsoft.com/office/drawing/2014/main" id="{7BB2FD91-4DB2-29C9-C529-835561264F52}"/>
+                  </a:ext>
+                </a:extLst>
+              </p:cNvPr>
+              <p:cNvSpPr>
+                <a:spLocks noGrp="1"/>
+              </p:cNvSpPr>
+              <p:nvPr>
+                <p:ph idx="1"/>
+              </p:nvPr>
+            </p:nvSpPr>
+            <p:spPr/>
+            <p:txBody>
+              <a:bodyPr>
+                <a:noAutofit/>
+              </a:bodyPr>
+              <a:lstStyle/>
+              <a:p>
+                <a:pPr marL="0" indent="0" rtl="0">
+                  <a:spcBef>
+                    <a:spcPts val="0"/>
+                  </a:spcBef>
+                  <a:spcAft>
+                    <a:spcPts val="0"/>
+                  </a:spcAft>
+                  <a:buNone/>
+                </a:pPr>
+                <a:r>
+                  <a:rPr lang="ru-RU" sz="2400" b="0" i="0" u="none" strike="noStrike" dirty="0">
+                    <a:solidFill>
+                      <a:srgbClr val="000000"/>
+                    </a:solidFill>
+                    <a:effectLst/>
+                  </a:rPr>
+                  <a:t>Задача о минимальной охране состоит в том, чтобы найти минимальное количество охранников, которые могут видеть каждую точку во внутренней части</a:t>
+                </a:r>
+                <a:r>
+                  <a:rPr lang="en-US" sz="2400" dirty="0"/>
+                  <a:t> </a:t>
+                </a:r>
+                <a:r>
+                  <a:rPr lang="ru-RU" sz="2400" b="0" i="0" u="none" strike="noStrike" dirty="0">
+                    <a:solidFill>
+                      <a:srgbClr val="000000"/>
+                    </a:solidFill>
+                    <a:effectLst/>
+                  </a:rPr>
+                  <a:t>многоугольника. </a:t>
+                </a:r>
+                <a:br>
+                  <a:rPr lang="en-US" sz="2400" b="0" i="0" u="none" strike="noStrike" dirty="0">
+                    <a:solidFill>
+                      <a:srgbClr val="000000"/>
+                    </a:solidFill>
+                    <a:effectLst/>
+                  </a:rPr>
+                </a:br>
+                <a:endParaRPr lang="en-US" sz="2400" b="0" i="0" u="none" strike="noStrike" dirty="0">
+                  <a:solidFill>
+                    <a:srgbClr val="000000"/>
+                  </a:solidFill>
+                  <a:effectLst/>
+                </a:endParaRPr>
+              </a:p>
+              <a:p>
+                <a:pPr marL="0" indent="0" rtl="0">
+                  <a:spcBef>
+                    <a:spcPts val="0"/>
+                  </a:spcBef>
+                  <a:spcAft>
+                    <a:spcPts val="0"/>
+                  </a:spcAft>
+                  <a:buNone/>
+                </a:pPr>
+                <a:r>
+                  <a:rPr lang="ru-RU" sz="2400" b="0" i="0" u="none" strike="noStrike" dirty="0">
+                    <a:solidFill>
+                      <a:srgbClr val="000000"/>
+                    </a:solidFill>
+                    <a:effectLst/>
+                  </a:rPr>
+                  <a:t>О'Рурк и Суповит показали, что проблемы минимальной охраны вершин, точек и ребер в многоугольниках с</a:t>
+                </a:r>
+                <a:r>
+                  <a:rPr lang="en-US" sz="2400" dirty="0"/>
+                  <a:t> </a:t>
+                </a:r>
+                <a:r>
+                  <a:rPr lang="ru-RU" sz="2400" b="0" i="0" u="none" strike="noStrike" dirty="0">
+                    <a:solidFill>
+                      <a:srgbClr val="000000"/>
+                    </a:solidFill>
+                    <a:effectLst/>
+                  </a:rPr>
+                  <a:t>дырами являются </a:t>
+                </a:r>
+                <a14:m>
+                  <m:oMath xmlns:m="http://schemas.openxmlformats.org/officeDocument/2006/math">
+                    <m:r>
+                      <a:rPr lang="en-US" sz="2400" b="0" i="1" u="none" strike="noStrike" smtClean="0">
+                        <a:solidFill>
+                          <a:srgbClr val="000000"/>
+                        </a:solidFill>
+                        <a:effectLst/>
+                        <a:latin typeface="Cambria Math" panose="02040503050406030204" pitchFamily="18" charset="0"/>
+                      </a:rPr>
+                      <m:t>𝑁𝑃</m:t>
+                    </m:r>
+                  </m:oMath>
+                </a14:m>
+                <a:r>
+                  <a:rPr lang="ru-RU" sz="2400" b="0" i="0" u="none" strike="noStrike" dirty="0">
+                    <a:solidFill>
+                      <a:srgbClr val="000000"/>
+                    </a:solidFill>
+                    <a:effectLst/>
+                  </a:rPr>
+                  <a:t>-трудными. </a:t>
+                </a:r>
+                <a:endParaRPr lang="en-US" sz="2400" b="0" i="0" u="none" strike="noStrike" dirty="0">
+                  <a:solidFill>
+                    <a:srgbClr val="000000"/>
+                  </a:solidFill>
+                  <a:effectLst/>
+                </a:endParaRPr>
+              </a:p>
+            </p:txBody>
+          </p:sp>
+        </mc:Choice>
+        <mc:Fallback xmlns="">
+          <p:sp>
+            <p:nvSpPr>
+              <p:cNvPr id="4" name="Объект 3">
+                <a:extLst>
+                  <a:ext uri="{FF2B5EF4-FFF2-40B4-BE49-F238E27FC236}">
+                    <a16:creationId xmlns:a16="http://schemas.microsoft.com/office/drawing/2014/main" id="{7BB2FD91-4DB2-29C9-C529-835561264F52}"/>
+                  </a:ext>
+                </a:extLst>
+              </p:cNvPr>
+              <p:cNvSpPr>
+                <a:spLocks noGrp="1" noRot="1" noChangeAspect="1" noMove="1" noResize="1" noEditPoints="1" noAdjustHandles="1" noChangeArrowheads="1" noChangeShapeType="1" noTextEdit="1"/>
+              </p:cNvSpPr>
+              <p:nvPr>
+                <p:ph idx="1"/>
+              </p:nvPr>
+            </p:nvSpPr>
+            <p:spPr>
+              <a:blipFill>
+                <a:blip r:embed="rId2"/>
+                <a:stretch>
+                  <a:fillRect l="-928" t="-1821"/>
+                </a:stretch>
+              </a:blipFill>
+            </p:spPr>
+            <p:txBody>
+              <a:bodyPr/>
+              <a:lstStyle/>
+              <a:p>
+                <a:r>
+                  <a:rPr lang="ru-RU">
+                    <a:noFill/>
+                  </a:rPr>
+                  <a:t> </a:t>
+                </a:r>
+              </a:p>
+            </p:txBody>
+          </p:sp>
+        </mc:Fallback>
+      </mc:AlternateContent>
+    </p:spTree>
+    <p:extLst>
+      <p:ext uri="{BB962C8B-B14F-4D97-AF65-F5344CB8AC3E}">
+        <p14:creationId xmlns:p14="http://schemas.microsoft.com/office/powerpoint/2010/main" val="3935919736"/>
+      </p:ext>
+    </p:extLst>
+  </p:cSld>
+  <p:clrMapOvr>
+    <a:masterClrMapping/>
+  </p:clrMapOvr>
+</p:sld>
+</file>
+
+<file path=ppt/slides/slide13.xml><?xml version="1.0" encoding="utf-8"?>
+<p:sld xmlns:a="http://schemas.openxmlformats.org/drawingml/2006/main" xmlns:r="http://schemas.openxmlformats.org/officeDocument/2006/relationships" xmlns:p="http://schemas.openxmlformats.org/presentationml/2006/main">
+  <p:cSld>
+    <p:spTree>
+      <p:nvGrpSpPr>
+        <p:cNvPr id="1" name=""/>
+        <p:cNvGrpSpPr/>
+        <p:nvPr/>
+      </p:nvGrpSpPr>
+      <p:grpSpPr>
+        <a:xfrm>
+          <a:off x="0" y="0"/>
+          <a:ext cx="0" cy="0"/>
+          <a:chOff x="0" y="0"/>
+          <a:chExt cx="0" cy="0"/>
+        </a:xfrm>
+      </p:grpSpPr>
+      <p:sp>
+        <p:nvSpPr>
+          <p:cNvPr id="2" name="Заголовок 1">
+            <a:extLst>
+              <a:ext uri="{FF2B5EF4-FFF2-40B4-BE49-F238E27FC236}">
+                <a16:creationId xmlns:a16="http://schemas.microsoft.com/office/drawing/2014/main" id="{26D51D08-4E36-3C59-C285-A89819162EA3}"/>
+              </a:ext>
+            </a:extLst>
+          </p:cNvPr>
+          <p:cNvSpPr>
+            <a:spLocks noGrp="1"/>
+          </p:cNvSpPr>
+          <p:nvPr>
+            <p:ph type="title"/>
+          </p:nvPr>
+        </p:nvSpPr>
+        <p:spPr>
+          <a:xfrm>
+            <a:off x="1055688" y="730384"/>
+            <a:ext cx="10072461" cy="677075"/>
+          </a:xfrm>
+        </p:spPr>
+        <p:txBody>
+          <a:bodyPr>
+            <a:normAutofit/>
+          </a:bodyPr>
+          <a:lstStyle/>
+          <a:p>
+            <a:r>
+              <a:rPr lang="ru-RU" sz="4000" dirty="0"/>
+              <a:t>Выпуклые многоугольники</a:t>
+            </a:r>
+          </a:p>
+        </p:txBody>
+      </p:sp>
+      <p:pic>
+        <p:nvPicPr>
+          <p:cNvPr id="7" name="Рисунок 6" descr="Изображение выглядит как треугольник, линия&#10;&#10;Автоматически созданное описание">
+            <a:extLst>
+              <a:ext uri="{FF2B5EF4-FFF2-40B4-BE49-F238E27FC236}">
+                <a16:creationId xmlns:a16="http://schemas.microsoft.com/office/drawing/2014/main" id="{5C2287FC-D039-C102-88C4-24C7D5427978}"/>
+              </a:ext>
+            </a:extLst>
+          </p:cNvPr>
+          <p:cNvPicPr>
+            <a:picLocks noChangeAspect="1"/>
+          </p:cNvPicPr>
+          <p:nvPr/>
+        </p:nvPicPr>
+        <p:blipFill>
+          <a:blip r:embed="rId2">
+            <a:extLst>
+              <a:ext uri="{28A0092B-C50C-407E-A947-70E740481C1C}">
+                <a14:useLocalDpi xmlns:a14="http://schemas.microsoft.com/office/drawing/2010/main" val="0"/>
+              </a:ext>
+            </a:extLst>
+          </a:blip>
+          <a:stretch>
+            <a:fillRect/>
+          </a:stretch>
+        </p:blipFill>
+        <p:spPr>
+          <a:xfrm>
+            <a:off x="1122118" y="1902266"/>
+            <a:ext cx="3927257" cy="3538769"/>
+          </a:xfrm>
+          <a:prstGeom prst="rect">
+            <a:avLst/>
+          </a:prstGeom>
+        </p:spPr>
+      </p:pic>
+      <p:pic>
+        <p:nvPicPr>
+          <p:cNvPr id="8" name="Объект 4" descr="Изображение выглядит как диаграмма, линия, снимок экрана, дизайн&#10;&#10;Автоматически созданное описание">
+            <a:extLst>
+              <a:ext uri="{FF2B5EF4-FFF2-40B4-BE49-F238E27FC236}">
+                <a16:creationId xmlns:a16="http://schemas.microsoft.com/office/drawing/2014/main" id="{68ED7B39-277F-BE76-73A7-F2C29BF8099B}"/>
+              </a:ext>
+            </a:extLst>
+          </p:cNvPr>
+          <p:cNvPicPr>
+            <a:picLocks noChangeAspect="1"/>
+          </p:cNvPicPr>
+          <p:nvPr/>
+        </p:nvPicPr>
+        <p:blipFill>
+          <a:blip r:embed="rId3">
+            <a:extLst>
+              <a:ext uri="{28A0092B-C50C-407E-A947-70E740481C1C}">
+                <a14:useLocalDpi xmlns:a14="http://schemas.microsoft.com/office/drawing/2010/main" val="0"/>
+              </a:ext>
+            </a:extLst>
+          </a:blip>
+          <a:stretch>
+            <a:fillRect/>
+          </a:stretch>
+        </p:blipFill>
+        <p:spPr>
+          <a:xfrm>
+            <a:off x="5227504" y="2081580"/>
+            <a:ext cx="5395672" cy="3359455"/>
+          </a:xfrm>
+          <a:prstGeom prst="rect">
+            <a:avLst/>
+          </a:prstGeom>
+        </p:spPr>
+      </p:pic>
+    </p:spTree>
+    <p:extLst>
+      <p:ext uri="{BB962C8B-B14F-4D97-AF65-F5344CB8AC3E}">
+        <p14:creationId xmlns:p14="http://schemas.microsoft.com/office/powerpoint/2010/main" val="855223049"/>
+      </p:ext>
+    </p:extLst>
+  </p:cSld>
+  <p:clrMapOvr>
+    <a:masterClrMapping/>
+  </p:clrMapOvr>
+</p:sld>
+</file>
+
+<file path=ppt/slides/slide14.xml><?xml version="1.0" encoding="utf-8"?>
+<p:sld xmlns:a="http://schemas.openxmlformats.org/drawingml/2006/main" xmlns:r="http://schemas.openxmlformats.org/officeDocument/2006/relationships" xmlns:p="http://schemas.openxmlformats.org/presentationml/2006/main">
+  <p:cSld>
+    <p:spTree>
+      <p:nvGrpSpPr>
+        <p:cNvPr id="1" name=""/>
+        <p:cNvGrpSpPr/>
+        <p:nvPr/>
+      </p:nvGrpSpPr>
+      <p:grpSpPr>
+        <a:xfrm>
+          <a:off x="0" y="0"/>
+          <a:ext cx="0" cy="0"/>
+          <a:chOff x="0" y="0"/>
+          <a:chExt cx="0" cy="0"/>
+        </a:xfrm>
+      </p:grpSpPr>
+      <p:pic>
+        <p:nvPicPr>
+          <p:cNvPr id="4" name="Рисунок 3" descr="Изображение выглядит как линия, круг&#10;&#10;Автоматически созданное описание">
+            <a:extLst>
+              <a:ext uri="{FF2B5EF4-FFF2-40B4-BE49-F238E27FC236}">
+                <a16:creationId xmlns:a16="http://schemas.microsoft.com/office/drawing/2014/main" id="{36CA5531-0CC4-A435-C571-D03258964374}"/>
+              </a:ext>
+            </a:extLst>
+          </p:cNvPr>
+          <p:cNvPicPr>
+            <a:picLocks noChangeAspect="1"/>
+          </p:cNvPicPr>
+          <p:nvPr/>
+        </p:nvPicPr>
+        <p:blipFill>
+          <a:blip r:embed="rId2">
+            <a:extLst>
+              <a:ext uri="{28A0092B-C50C-407E-A947-70E740481C1C}">
+                <a14:useLocalDpi xmlns:a14="http://schemas.microsoft.com/office/drawing/2010/main" val="0"/>
+              </a:ext>
+            </a:extLst>
+          </a:blip>
+          <a:stretch>
+            <a:fillRect/>
+          </a:stretch>
+        </p:blipFill>
+        <p:spPr>
+          <a:xfrm>
+            <a:off x="6409979" y="1873950"/>
+            <a:ext cx="3997829" cy="3907959"/>
+          </a:xfrm>
+          <a:prstGeom prst="rect">
+            <a:avLst/>
+          </a:prstGeom>
+        </p:spPr>
+      </p:pic>
+      <p:pic>
+        <p:nvPicPr>
+          <p:cNvPr id="6" name="Рисунок 5">
+            <a:extLst>
+              <a:ext uri="{FF2B5EF4-FFF2-40B4-BE49-F238E27FC236}">
+                <a16:creationId xmlns:a16="http://schemas.microsoft.com/office/drawing/2014/main" id="{F8C989E9-04CF-D24C-459A-411A00081432}"/>
+              </a:ext>
+            </a:extLst>
+          </p:cNvPr>
+          <p:cNvPicPr>
+            <a:picLocks noChangeAspect="1"/>
+          </p:cNvPicPr>
+          <p:nvPr/>
+        </p:nvPicPr>
+        <p:blipFill>
+          <a:blip r:embed="rId3">
+            <a:extLst>
+              <a:ext uri="{28A0092B-C50C-407E-A947-70E740481C1C}">
+                <a14:useLocalDpi xmlns:a14="http://schemas.microsoft.com/office/drawing/2010/main" val="0"/>
+              </a:ext>
+            </a:extLst>
+          </a:blip>
+          <a:stretch>
+            <a:fillRect/>
+          </a:stretch>
+        </p:blipFill>
+        <p:spPr>
+          <a:xfrm>
+            <a:off x="1369666" y="1825956"/>
+            <a:ext cx="4726334" cy="4421570"/>
+          </a:xfrm>
+          <a:prstGeom prst="rect">
+            <a:avLst/>
+          </a:prstGeom>
+        </p:spPr>
+      </p:pic>
+      <p:sp>
+        <p:nvSpPr>
+          <p:cNvPr id="9" name="Заголовок 1">
+            <a:extLst>
+              <a:ext uri="{FF2B5EF4-FFF2-40B4-BE49-F238E27FC236}">
+                <a16:creationId xmlns:a16="http://schemas.microsoft.com/office/drawing/2014/main" id="{46D24553-23AB-8D92-20DD-E21A805FA97B}"/>
+              </a:ext>
+            </a:extLst>
+          </p:cNvPr>
+          <p:cNvSpPr>
+            <a:spLocks noGrp="1"/>
+          </p:cNvSpPr>
+          <p:nvPr>
+            <p:ph type="title"/>
+          </p:nvPr>
+        </p:nvSpPr>
+        <p:spPr>
+          <a:xfrm>
+            <a:off x="1055688" y="728664"/>
+            <a:ext cx="10080625" cy="678796"/>
+          </a:xfrm>
+        </p:spPr>
+        <p:txBody>
+          <a:bodyPr>
+            <a:normAutofit/>
+          </a:bodyPr>
+          <a:lstStyle/>
+          <a:p>
+            <a:r>
+              <a:rPr lang="ru-RU" sz="4000" dirty="0"/>
+              <a:t>Звездчатые и веерные многоугольники</a:t>
+            </a:r>
+          </a:p>
+        </p:txBody>
+      </p:sp>
+    </p:spTree>
+    <p:extLst>
+      <p:ext uri="{BB962C8B-B14F-4D97-AF65-F5344CB8AC3E}">
+        <p14:creationId xmlns:p14="http://schemas.microsoft.com/office/powerpoint/2010/main" val="4185973192"/>
+      </p:ext>
+    </p:extLst>
+  </p:cSld>
+  <p:clrMapOvr>
+    <a:masterClrMapping/>
+  </p:clrMapOvr>
+</p:sld>
+</file>
+
+<file path=ppt/slides/slide15.xml><?xml version="1.0" encoding="utf-8"?>
+<p:sld xmlns:a="http://schemas.openxmlformats.org/drawingml/2006/main" xmlns:r="http://schemas.openxmlformats.org/officeDocument/2006/relationships" xmlns:p="http://schemas.openxmlformats.org/presentationml/2006/main">
+  <p:cSld>
+    <p:spTree>
+      <p:nvGrpSpPr>
+        <p:cNvPr id="1" name=""/>
+        <p:cNvGrpSpPr/>
+        <p:nvPr/>
+      </p:nvGrpSpPr>
+      <p:grpSpPr>
+        <a:xfrm>
+          <a:off x="0" y="0"/>
+          <a:ext cx="0" cy="0"/>
+          <a:chOff x="0" y="0"/>
+          <a:chExt cx="0" cy="0"/>
+        </a:xfrm>
+      </p:grpSpPr>
+      <p:sp>
+        <p:nvSpPr>
+          <p:cNvPr id="2" name="Заголовок 1">
+            <a:extLst>
+              <a:ext uri="{FF2B5EF4-FFF2-40B4-BE49-F238E27FC236}">
+                <a16:creationId xmlns:a16="http://schemas.microsoft.com/office/drawing/2014/main" id="{78CC4E43-432F-FF98-376F-55D04A47FC4A}"/>
+              </a:ext>
+            </a:extLst>
+          </p:cNvPr>
+          <p:cNvSpPr>
+            <a:spLocks noGrp="1"/>
+          </p:cNvSpPr>
+          <p:nvPr>
+            <p:ph type="title"/>
+          </p:nvPr>
+        </p:nvSpPr>
+        <p:spPr>
+          <a:xfrm>
+            <a:off x="838200" y="365125"/>
+            <a:ext cx="10515600" cy="1325563"/>
+          </a:xfrm>
+        </p:spPr>
+        <p:txBody>
+          <a:bodyPr/>
+          <a:lstStyle/>
+          <a:p>
+            <a:r>
+              <a:rPr lang="ru-RU" dirty="0"/>
+              <a:t>Многоугольник с покрытыми стенами</a:t>
+            </a:r>
+          </a:p>
+        </p:txBody>
+      </p:sp>
+      <p:pic>
+        <p:nvPicPr>
+          <p:cNvPr id="5" name="Объект 4" descr="Изображение выглядит как линия, диаграмма, Параллельный, График&#10;&#10;Автоматически созданное описание">
+            <a:extLst>
+              <a:ext uri="{FF2B5EF4-FFF2-40B4-BE49-F238E27FC236}">
+                <a16:creationId xmlns:a16="http://schemas.microsoft.com/office/drawing/2014/main" id="{7FBEAAA4-25BF-5F5A-A161-054399257F85}"/>
+              </a:ext>
+            </a:extLst>
+          </p:cNvPr>
+          <p:cNvPicPr>
+            <a:picLocks noGrp="1" noChangeAspect="1"/>
+          </p:cNvPicPr>
+          <p:nvPr>
+            <p:ph idx="1"/>
+          </p:nvPr>
+        </p:nvPicPr>
+        <p:blipFill>
+          <a:blip r:embed="rId2">
+            <a:extLst>
+              <a:ext uri="{28A0092B-C50C-407E-A947-70E740481C1C}">
+                <a14:useLocalDpi xmlns:a14="http://schemas.microsoft.com/office/drawing/2010/main" val="0"/>
+              </a:ext>
+            </a:extLst>
+          </a:blip>
+          <a:stretch>
+            <a:fillRect/>
+          </a:stretch>
+        </p:blipFill>
+        <p:spPr>
+          <a:xfrm>
+            <a:off x="4255049" y="1825625"/>
+            <a:ext cx="3681901" cy="4351338"/>
+          </a:xfrm>
+        </p:spPr>
+      </p:pic>
+    </p:spTree>
+    <p:extLst>
+      <p:ext uri="{BB962C8B-B14F-4D97-AF65-F5344CB8AC3E}">
+        <p14:creationId xmlns:p14="http://schemas.microsoft.com/office/powerpoint/2010/main" val="2571953755"/>
+      </p:ext>
+    </p:extLst>
+  </p:cSld>
+  <p:clrMapOvr>
+    <a:masterClrMapping/>
+  </p:clrMapOvr>
+</p:sld>
+</file>
+
+<file path=ppt/slides/slide16.xml><?xml version="1.0" encoding="utf-8"?>
+<p:sld xmlns:a="http://schemas.openxmlformats.org/drawingml/2006/main" xmlns:r="http://schemas.openxmlformats.org/officeDocument/2006/relationships" xmlns:p="http://schemas.openxmlformats.org/presentationml/2006/main">
+  <p:cSld>
+    <p:spTree>
+      <p:nvGrpSpPr>
+        <p:cNvPr id="1" name=""/>
+        <p:cNvGrpSpPr/>
+        <p:nvPr/>
+      </p:nvGrpSpPr>
+      <p:grpSpPr>
+        <a:xfrm>
+          <a:off x="0" y="0"/>
+          <a:ext cx="0" cy="0"/>
+          <a:chOff x="0" y="0"/>
+          <a:chExt cx="0" cy="0"/>
+        </a:xfrm>
+      </p:grpSpPr>
+      <p:sp>
+        <p:nvSpPr>
+          <p:cNvPr id="3" name="Заголовок 1">
+            <a:extLst>
+              <a:ext uri="{FF2B5EF4-FFF2-40B4-BE49-F238E27FC236}">
+                <a16:creationId xmlns:a16="http://schemas.microsoft.com/office/drawing/2014/main" id="{8D29F20A-2427-966B-F9DE-8D08B91BBE73}"/>
+              </a:ext>
+            </a:extLst>
+          </p:cNvPr>
+          <p:cNvSpPr txBox="1">
+            <a:spLocks/>
+          </p:cNvSpPr>
+          <p:nvPr/>
+        </p:nvSpPr>
+        <p:spPr>
+          <a:xfrm>
+            <a:off x="1055688" y="728664"/>
+            <a:ext cx="10080625" cy="678796"/>
+          </a:xfrm>
+          <a:prstGeom prst="rect">
+            <a:avLst/>
+          </a:prstGeom>
+        </p:spPr>
+        <p:txBody>
+          <a:bodyPr vert="horz" lIns="91440" tIns="45720" rIns="91440" bIns="45720" rtlCol="0" anchor="b">
+            <a:normAutofit/>
+          </a:bodyPr>
+          <a:lstStyle>
+            <a:lvl1pPr algn="l" defTabSz="914400" rtl="0" eaLnBrk="1" latinLnBrk="0" hangingPunct="1">
+              <a:lnSpc>
+                <a:spcPct val="90000"/>
+              </a:lnSpc>
+              <a:spcBef>
+                <a:spcPct val="0"/>
+              </a:spcBef>
+              <a:buNone/>
+              <a:defRPr sz="6000" kern="1200">
+                <a:solidFill>
+                  <a:schemeClr val="tx1"/>
+                </a:solidFill>
+                <a:latin typeface="+mj-lt"/>
+                <a:ea typeface="+mj-ea"/>
+                <a:cs typeface="+mj-cs"/>
+              </a:defRPr>
+            </a:lvl1pPr>
+          </a:lstStyle>
+          <a:p>
+            <a:r>
+              <a:rPr lang="ru-RU" sz="4000" dirty="0"/>
+              <a:t>Разбиение на компоненты видимости</a:t>
+            </a:r>
+          </a:p>
+        </p:txBody>
+      </p:sp>
+      <p:pic>
+        <p:nvPicPr>
+          <p:cNvPr id="7" name="Рисунок 6">
+            <a:extLst>
+              <a:ext uri="{FF2B5EF4-FFF2-40B4-BE49-F238E27FC236}">
+                <a16:creationId xmlns:a16="http://schemas.microsoft.com/office/drawing/2014/main" id="{D21F928F-6088-7EB3-7603-A7E1E626C7AF}"/>
+              </a:ext>
+            </a:extLst>
+          </p:cNvPr>
+          <p:cNvPicPr>
+            <a:picLocks noChangeAspect="1"/>
+          </p:cNvPicPr>
+          <p:nvPr/>
+        </p:nvPicPr>
+        <p:blipFill>
+          <a:blip r:embed="rId2">
+            <a:extLst>
+              <a:ext uri="{28A0092B-C50C-407E-A947-70E740481C1C}">
+                <a14:useLocalDpi xmlns:a14="http://schemas.microsoft.com/office/drawing/2010/main" val="0"/>
+              </a:ext>
+            </a:extLst>
+          </a:blip>
+          <a:stretch>
+            <a:fillRect/>
+          </a:stretch>
+        </p:blipFill>
+        <p:spPr>
+          <a:xfrm>
+            <a:off x="4511950" y="2623840"/>
+            <a:ext cx="3271078" cy="3643527"/>
+          </a:xfrm>
+          <a:prstGeom prst="rect">
+            <a:avLst/>
+          </a:prstGeom>
+        </p:spPr>
+      </p:pic>
+      <p:pic>
+        <p:nvPicPr>
+          <p:cNvPr id="9" name="Рисунок 8">
+            <a:extLst>
+              <a:ext uri="{FF2B5EF4-FFF2-40B4-BE49-F238E27FC236}">
+                <a16:creationId xmlns:a16="http://schemas.microsoft.com/office/drawing/2014/main" id="{2A283B3A-9EDB-7FA4-E3E8-F6975C739B80}"/>
+              </a:ext>
+            </a:extLst>
+          </p:cNvPr>
+          <p:cNvPicPr>
+            <a:picLocks noChangeAspect="1"/>
+          </p:cNvPicPr>
+          <p:nvPr/>
+        </p:nvPicPr>
+        <p:blipFill>
+          <a:blip r:embed="rId3">
+            <a:extLst>
+              <a:ext uri="{28A0092B-C50C-407E-A947-70E740481C1C}">
+                <a14:useLocalDpi xmlns:a14="http://schemas.microsoft.com/office/drawing/2010/main" val="0"/>
+              </a:ext>
+            </a:extLst>
+          </a:blip>
+          <a:stretch>
+            <a:fillRect/>
+          </a:stretch>
+        </p:blipFill>
+        <p:spPr>
+          <a:xfrm>
+            <a:off x="248459" y="2580853"/>
+            <a:ext cx="4160515" cy="3280228"/>
+          </a:xfrm>
+          <a:prstGeom prst="rect">
+            <a:avLst/>
+          </a:prstGeom>
+        </p:spPr>
+      </p:pic>
+      <p:sp>
+        <p:nvSpPr>
+          <p:cNvPr id="2" name="TextBox 1">
+            <a:extLst>
+              <a:ext uri="{FF2B5EF4-FFF2-40B4-BE49-F238E27FC236}">
+                <a16:creationId xmlns:a16="http://schemas.microsoft.com/office/drawing/2014/main" id="{36A6B241-AA3E-942F-EEDF-0E7B669FE535}"/>
+              </a:ext>
+            </a:extLst>
+          </p:cNvPr>
+          <p:cNvSpPr txBox="1"/>
+          <p:nvPr/>
+        </p:nvSpPr>
+        <p:spPr>
+          <a:xfrm>
+            <a:off x="1055688" y="1524413"/>
+            <a:ext cx="8852370" cy="830997"/>
+          </a:xfrm>
+          <a:prstGeom prst="rect">
+            <a:avLst/>
+          </a:prstGeom>
+          <a:noFill/>
+        </p:spPr>
+        <p:txBody>
+          <a:bodyPr wrap="square">
+            <a:spAutoFit/>
+          </a:bodyPr>
+          <a:lstStyle/>
+          <a:p>
+            <a:r>
+              <a:rPr lang="ru-RU" sz="2400" dirty="0"/>
+              <a:t>Каждый выпуклый компонент либо полностью виден, либо полностью не виден из вершины многоугольника.</a:t>
+            </a:r>
+          </a:p>
+        </p:txBody>
+      </p:sp>
+      <p:pic>
+        <p:nvPicPr>
+          <p:cNvPr id="6" name="Рисунок 5">
+            <a:extLst>
+              <a:ext uri="{FF2B5EF4-FFF2-40B4-BE49-F238E27FC236}">
+                <a16:creationId xmlns:a16="http://schemas.microsoft.com/office/drawing/2014/main" id="{D4E71377-3DC6-2AEA-31D5-19BC409C7AF5}"/>
+              </a:ext>
+            </a:extLst>
+          </p:cNvPr>
+          <p:cNvPicPr>
+            <a:picLocks noChangeAspect="1"/>
+          </p:cNvPicPr>
+          <p:nvPr/>
+        </p:nvPicPr>
+        <p:blipFill>
+          <a:blip r:embed="rId4">
+            <a:extLst>
+              <a:ext uri="{28A0092B-C50C-407E-A947-70E740481C1C}">
+                <a14:useLocalDpi xmlns:a14="http://schemas.microsoft.com/office/drawing/2010/main" val="0"/>
+              </a:ext>
+            </a:extLst>
+          </a:blip>
+          <a:stretch>
+            <a:fillRect/>
+          </a:stretch>
+        </p:blipFill>
+        <p:spPr>
+          <a:xfrm>
+            <a:off x="7507031" y="2676576"/>
+            <a:ext cx="4275145" cy="3452080"/>
+          </a:xfrm>
+          <a:prstGeom prst="rect">
+            <a:avLst/>
+          </a:prstGeom>
+        </p:spPr>
+      </p:pic>
+    </p:spTree>
+    <p:extLst>
+      <p:ext uri="{BB962C8B-B14F-4D97-AF65-F5344CB8AC3E}">
+        <p14:creationId xmlns:p14="http://schemas.microsoft.com/office/powerpoint/2010/main" val="1478404042"/>
+      </p:ext>
+    </p:extLst>
+  </p:cSld>
+  <p:clrMapOvr>
+    <a:masterClrMapping/>
+  </p:clrMapOvr>
+</p:sld>
+</file>
+
+<file path=ppt/slides/slide17.xml><?xml version="1.0" encoding="utf-8"?>
+<p:sld xmlns:a="http://schemas.openxmlformats.org/drawingml/2006/main" xmlns:r="http://schemas.openxmlformats.org/officeDocument/2006/relationships" xmlns:p="http://schemas.openxmlformats.org/presentationml/2006/main">
+  <p:cSld>
+    <p:spTree>
+      <p:nvGrpSpPr>
+        <p:cNvPr id="1" name=""/>
+        <p:cNvGrpSpPr/>
+        <p:nvPr/>
+      </p:nvGrpSpPr>
+      <p:grpSpPr>
+        <a:xfrm>
+          <a:off x="0" y="0"/>
+          <a:ext cx="0" cy="0"/>
+          <a:chOff x="0" y="0"/>
+          <a:chExt cx="0" cy="0"/>
+        </a:xfrm>
+      </p:grpSpPr>
+      <p:sp>
+        <p:nvSpPr>
+          <p:cNvPr id="4" name="Овал 3">
+            <a:extLst>
+              <a:ext uri="{FF2B5EF4-FFF2-40B4-BE49-F238E27FC236}">
+                <a16:creationId xmlns:a16="http://schemas.microsoft.com/office/drawing/2014/main" id="{36CA5298-7C21-7200-6C14-9D599889A17F}"/>
+              </a:ext>
+            </a:extLst>
+          </p:cNvPr>
+          <p:cNvSpPr/>
+          <p:nvPr/>
+        </p:nvSpPr>
+        <p:spPr>
+          <a:xfrm>
+            <a:off x="5725177" y="2675236"/>
+            <a:ext cx="210065" cy="210065"/>
+          </a:xfrm>
+          <a:prstGeom prst="ellipse">
+            <a:avLst/>
+          </a:prstGeom>
+          <a:solidFill>
+            <a:schemeClr val="bg2">
+              <a:lumMod val="75000"/>
+            </a:schemeClr>
+          </a:solidFill>
+          <a:ln>
+            <a:solidFill>
+              <a:schemeClr val="tx1">
+                <a:lumMod val="95000"/>
+                <a:lumOff val="5000"/>
+              </a:schemeClr>
+            </a:solidFill>
+          </a:ln>
+        </p:spPr>
+        <p:style>
+          <a:lnRef idx="2">
+            <a:schemeClr val="accent1">
+              <a:shade val="15000"/>
+            </a:schemeClr>
+          </a:lnRef>
+          <a:fillRef idx="1">
+            <a:schemeClr val="accent1"/>
+          </a:fillRef>
+          <a:effectRef idx="0">
+            <a:schemeClr val="accent1"/>
+          </a:effectRef>
+          <a:fontRef idx="minor">
+            <a:schemeClr val="lt1"/>
+          </a:fontRef>
+        </p:style>
+        <p:txBody>
+          <a:bodyPr rtlCol="0" anchor="ctr"/>
+          <a:lstStyle/>
+          <a:p>
+            <a:pPr algn="ctr"/>
+            <a:endParaRPr lang="ru-RU"/>
+          </a:p>
+        </p:txBody>
+      </p:sp>
+      <p:sp>
+        <p:nvSpPr>
+          <p:cNvPr id="5" name="Овал 4">
+            <a:extLst>
+              <a:ext uri="{FF2B5EF4-FFF2-40B4-BE49-F238E27FC236}">
+                <a16:creationId xmlns:a16="http://schemas.microsoft.com/office/drawing/2014/main" id="{87A471E0-E7BA-A3A0-A4BF-AEBD6F2C6890}"/>
+              </a:ext>
+            </a:extLst>
+          </p:cNvPr>
+          <p:cNvSpPr/>
+          <p:nvPr/>
+        </p:nvSpPr>
+        <p:spPr>
+          <a:xfrm>
+            <a:off x="4723796" y="2675236"/>
+            <a:ext cx="210065" cy="210065"/>
+          </a:xfrm>
+          <a:prstGeom prst="ellipse">
+            <a:avLst/>
+          </a:prstGeom>
+          <a:solidFill>
+            <a:schemeClr val="bg2">
+              <a:lumMod val="75000"/>
+            </a:schemeClr>
+          </a:solidFill>
+          <a:ln>
+            <a:solidFill>
+              <a:schemeClr val="tx1">
+                <a:lumMod val="95000"/>
+                <a:lumOff val="5000"/>
+              </a:schemeClr>
+            </a:solidFill>
+          </a:ln>
+        </p:spPr>
+        <p:style>
+          <a:lnRef idx="2">
+            <a:schemeClr val="accent1">
+              <a:shade val="15000"/>
+            </a:schemeClr>
+          </a:lnRef>
+          <a:fillRef idx="1">
+            <a:schemeClr val="accent1"/>
+          </a:fillRef>
+          <a:effectRef idx="0">
+            <a:schemeClr val="accent1"/>
+          </a:effectRef>
+          <a:fontRef idx="minor">
+            <a:schemeClr val="lt1"/>
+          </a:fontRef>
+        </p:style>
+        <p:txBody>
+          <a:bodyPr rtlCol="0" anchor="ctr"/>
+          <a:lstStyle/>
+          <a:p>
+            <a:pPr algn="ctr"/>
+            <a:endParaRPr lang="ru-RU"/>
+          </a:p>
+        </p:txBody>
+      </p:sp>
+      <p:sp>
+        <p:nvSpPr>
+          <p:cNvPr id="7" name="Овал 6">
+            <a:extLst>
+              <a:ext uri="{FF2B5EF4-FFF2-40B4-BE49-F238E27FC236}">
+                <a16:creationId xmlns:a16="http://schemas.microsoft.com/office/drawing/2014/main" id="{2352E168-6D39-0ECF-B6C3-3BC87366477D}"/>
+              </a:ext>
+            </a:extLst>
+          </p:cNvPr>
+          <p:cNvSpPr/>
+          <p:nvPr/>
+        </p:nvSpPr>
+        <p:spPr>
+          <a:xfrm>
+            <a:off x="6726558" y="2675237"/>
+            <a:ext cx="210065" cy="210065"/>
+          </a:xfrm>
+          <a:prstGeom prst="ellipse">
+            <a:avLst/>
+          </a:prstGeom>
+          <a:solidFill>
+            <a:schemeClr val="bg2">
+              <a:lumMod val="75000"/>
+            </a:schemeClr>
+          </a:solidFill>
+          <a:ln>
+            <a:solidFill>
+              <a:schemeClr val="tx1">
+                <a:lumMod val="95000"/>
+                <a:lumOff val="5000"/>
+              </a:schemeClr>
+            </a:solidFill>
+          </a:ln>
+        </p:spPr>
+        <p:style>
+          <a:lnRef idx="2">
+            <a:schemeClr val="accent1">
+              <a:shade val="15000"/>
+            </a:schemeClr>
+          </a:lnRef>
+          <a:fillRef idx="1">
+            <a:schemeClr val="accent1"/>
+          </a:fillRef>
+          <a:effectRef idx="0">
+            <a:schemeClr val="accent1"/>
+          </a:effectRef>
+          <a:fontRef idx="minor">
+            <a:schemeClr val="lt1"/>
+          </a:fontRef>
+        </p:style>
+        <p:txBody>
+          <a:bodyPr rtlCol="0" anchor="ctr"/>
+          <a:lstStyle/>
+          <a:p>
+            <a:pPr algn="ctr"/>
+            <a:endParaRPr lang="ru-RU"/>
+          </a:p>
+        </p:txBody>
+      </p:sp>
+      <p:sp>
+        <p:nvSpPr>
+          <p:cNvPr id="8" name="Овал 7">
+            <a:extLst>
+              <a:ext uri="{FF2B5EF4-FFF2-40B4-BE49-F238E27FC236}">
+                <a16:creationId xmlns:a16="http://schemas.microsoft.com/office/drawing/2014/main" id="{C344E232-BB96-646D-1A80-2FC592BFA6FB}"/>
+              </a:ext>
+            </a:extLst>
+          </p:cNvPr>
+          <p:cNvSpPr/>
+          <p:nvPr/>
+        </p:nvSpPr>
+        <p:spPr>
+          <a:xfrm>
+            <a:off x="5725177" y="3323967"/>
+            <a:ext cx="210065" cy="210065"/>
+          </a:xfrm>
+          <a:prstGeom prst="ellipse">
+            <a:avLst/>
+          </a:prstGeom>
+          <a:solidFill>
+            <a:schemeClr val="bg2">
+              <a:lumMod val="75000"/>
+            </a:schemeClr>
+          </a:solidFill>
+          <a:ln>
+            <a:solidFill>
+              <a:schemeClr val="tx1">
+                <a:lumMod val="95000"/>
+                <a:lumOff val="5000"/>
+              </a:schemeClr>
+            </a:solidFill>
+          </a:ln>
+        </p:spPr>
+        <p:style>
+          <a:lnRef idx="2">
+            <a:schemeClr val="accent1">
+              <a:shade val="15000"/>
+            </a:schemeClr>
+          </a:lnRef>
+          <a:fillRef idx="1">
+            <a:schemeClr val="accent1"/>
+          </a:fillRef>
+          <a:effectRef idx="0">
+            <a:schemeClr val="accent1"/>
+          </a:effectRef>
+          <a:fontRef idx="minor">
+            <a:schemeClr val="lt1"/>
+          </a:fontRef>
+        </p:style>
+        <p:txBody>
+          <a:bodyPr rtlCol="0" anchor="ctr"/>
+          <a:lstStyle/>
+          <a:p>
+            <a:pPr algn="ctr"/>
+            <a:endParaRPr lang="ru-RU"/>
+          </a:p>
+        </p:txBody>
+      </p:sp>
+      <p:sp>
+        <p:nvSpPr>
+          <p:cNvPr id="9" name="Овал 8">
+            <a:extLst>
+              <a:ext uri="{FF2B5EF4-FFF2-40B4-BE49-F238E27FC236}">
+                <a16:creationId xmlns:a16="http://schemas.microsoft.com/office/drawing/2014/main" id="{3C4DD965-5CBC-E08C-D7D9-609CA0C02AC8}"/>
+              </a:ext>
+            </a:extLst>
+          </p:cNvPr>
+          <p:cNvSpPr/>
+          <p:nvPr/>
+        </p:nvSpPr>
+        <p:spPr>
+          <a:xfrm>
+            <a:off x="4723796" y="3323967"/>
+            <a:ext cx="210065" cy="210065"/>
+          </a:xfrm>
+          <a:prstGeom prst="ellipse">
+            <a:avLst/>
+          </a:prstGeom>
+          <a:solidFill>
+            <a:schemeClr val="bg2">
+              <a:lumMod val="75000"/>
+            </a:schemeClr>
+          </a:solidFill>
+          <a:ln>
+            <a:solidFill>
+              <a:schemeClr val="tx1">
+                <a:lumMod val="95000"/>
+                <a:lumOff val="5000"/>
+              </a:schemeClr>
+            </a:solidFill>
+          </a:ln>
+        </p:spPr>
+        <p:style>
+          <a:lnRef idx="2">
+            <a:schemeClr val="accent1">
+              <a:shade val="15000"/>
+            </a:schemeClr>
+          </a:lnRef>
+          <a:fillRef idx="1">
+            <a:schemeClr val="accent1"/>
+          </a:fillRef>
+          <a:effectRef idx="0">
+            <a:schemeClr val="accent1"/>
+          </a:effectRef>
+          <a:fontRef idx="minor">
+            <a:schemeClr val="lt1"/>
+          </a:fontRef>
+        </p:style>
+        <p:txBody>
+          <a:bodyPr rtlCol="0" anchor="ctr"/>
+          <a:lstStyle/>
+          <a:p>
+            <a:pPr algn="ctr"/>
+            <a:endParaRPr lang="ru-RU"/>
+          </a:p>
+        </p:txBody>
+      </p:sp>
+      <p:sp>
+        <p:nvSpPr>
+          <p:cNvPr id="10" name="Овал 9">
+            <a:extLst>
+              <a:ext uri="{FF2B5EF4-FFF2-40B4-BE49-F238E27FC236}">
+                <a16:creationId xmlns:a16="http://schemas.microsoft.com/office/drawing/2014/main" id="{F9823872-924B-2122-69CE-6E513566986C}"/>
+              </a:ext>
+            </a:extLst>
+          </p:cNvPr>
+          <p:cNvSpPr/>
+          <p:nvPr/>
+        </p:nvSpPr>
+        <p:spPr>
+          <a:xfrm>
+            <a:off x="6726558" y="3323968"/>
+            <a:ext cx="210065" cy="210065"/>
+          </a:xfrm>
+          <a:prstGeom prst="ellipse">
+            <a:avLst/>
+          </a:prstGeom>
+          <a:solidFill>
+            <a:schemeClr val="bg2">
+              <a:lumMod val="75000"/>
+            </a:schemeClr>
+          </a:solidFill>
+          <a:ln>
+            <a:solidFill>
+              <a:schemeClr val="tx1">
+                <a:lumMod val="95000"/>
+                <a:lumOff val="5000"/>
+              </a:schemeClr>
+            </a:solidFill>
+          </a:ln>
+        </p:spPr>
+        <p:style>
+          <a:lnRef idx="2">
+            <a:schemeClr val="accent1">
+              <a:shade val="15000"/>
+            </a:schemeClr>
+          </a:lnRef>
+          <a:fillRef idx="1">
+            <a:schemeClr val="accent1"/>
+          </a:fillRef>
+          <a:effectRef idx="0">
+            <a:schemeClr val="accent1"/>
+          </a:effectRef>
+          <a:fontRef idx="minor">
+            <a:schemeClr val="lt1"/>
+          </a:fontRef>
+        </p:style>
+        <p:txBody>
+          <a:bodyPr rtlCol="0" anchor="ctr"/>
+          <a:lstStyle/>
+          <a:p>
+            <a:pPr algn="ctr"/>
+            <a:endParaRPr lang="ru-RU"/>
+          </a:p>
+        </p:txBody>
+      </p:sp>
+      <p:sp>
+        <p:nvSpPr>
+          <p:cNvPr id="11" name="Овал 10">
+            <a:extLst>
+              <a:ext uri="{FF2B5EF4-FFF2-40B4-BE49-F238E27FC236}">
+                <a16:creationId xmlns:a16="http://schemas.microsoft.com/office/drawing/2014/main" id="{4AD0AA00-E293-5205-F2F2-72DDD4B187BE}"/>
+              </a:ext>
+            </a:extLst>
+          </p:cNvPr>
+          <p:cNvSpPr/>
+          <p:nvPr/>
+        </p:nvSpPr>
+        <p:spPr>
+          <a:xfrm>
+            <a:off x="5725177" y="3972698"/>
+            <a:ext cx="210065" cy="210065"/>
+          </a:xfrm>
+          <a:prstGeom prst="ellipse">
+            <a:avLst/>
+          </a:prstGeom>
+          <a:solidFill>
+            <a:schemeClr val="bg2">
+              <a:lumMod val="75000"/>
+            </a:schemeClr>
+          </a:solidFill>
+          <a:ln>
+            <a:solidFill>
+              <a:schemeClr val="tx1">
+                <a:lumMod val="95000"/>
+                <a:lumOff val="5000"/>
+              </a:schemeClr>
+            </a:solidFill>
+          </a:ln>
+        </p:spPr>
+        <p:style>
+          <a:lnRef idx="2">
+            <a:schemeClr val="accent1">
+              <a:shade val="15000"/>
+            </a:schemeClr>
+          </a:lnRef>
+          <a:fillRef idx="1">
+            <a:schemeClr val="accent1"/>
+          </a:fillRef>
+          <a:effectRef idx="0">
+            <a:schemeClr val="accent1"/>
+          </a:effectRef>
+          <a:fontRef idx="minor">
+            <a:schemeClr val="lt1"/>
+          </a:fontRef>
+        </p:style>
+        <p:txBody>
+          <a:bodyPr rtlCol="0" anchor="ctr"/>
+          <a:lstStyle/>
+          <a:p>
+            <a:pPr algn="ctr"/>
+            <a:endParaRPr lang="ru-RU"/>
+          </a:p>
+        </p:txBody>
+      </p:sp>
+      <p:sp>
+        <p:nvSpPr>
+          <p:cNvPr id="12" name="Овал 11">
+            <a:extLst>
+              <a:ext uri="{FF2B5EF4-FFF2-40B4-BE49-F238E27FC236}">
+                <a16:creationId xmlns:a16="http://schemas.microsoft.com/office/drawing/2014/main" id="{429C1C95-A94E-E5B6-D8A4-4E5C9326E7AC}"/>
+              </a:ext>
+            </a:extLst>
+          </p:cNvPr>
+          <p:cNvSpPr/>
+          <p:nvPr/>
+        </p:nvSpPr>
+        <p:spPr>
+          <a:xfrm>
+            <a:off x="4723796" y="3972698"/>
+            <a:ext cx="210065" cy="210065"/>
+          </a:xfrm>
+          <a:prstGeom prst="ellipse">
+            <a:avLst/>
+          </a:prstGeom>
+          <a:solidFill>
+            <a:schemeClr val="bg2">
+              <a:lumMod val="75000"/>
+            </a:schemeClr>
+          </a:solidFill>
+          <a:ln>
+            <a:solidFill>
+              <a:schemeClr val="tx1">
+                <a:lumMod val="95000"/>
+                <a:lumOff val="5000"/>
+              </a:schemeClr>
+            </a:solidFill>
+          </a:ln>
+        </p:spPr>
+        <p:style>
+          <a:lnRef idx="2">
+            <a:schemeClr val="accent1">
+              <a:shade val="15000"/>
+            </a:schemeClr>
+          </a:lnRef>
+          <a:fillRef idx="1">
+            <a:schemeClr val="accent1"/>
+          </a:fillRef>
+          <a:effectRef idx="0">
+            <a:schemeClr val="accent1"/>
+          </a:effectRef>
+          <a:fontRef idx="minor">
+            <a:schemeClr val="lt1"/>
+          </a:fontRef>
+        </p:style>
+        <p:txBody>
+          <a:bodyPr rtlCol="0" anchor="ctr"/>
+          <a:lstStyle/>
+          <a:p>
+            <a:pPr algn="ctr"/>
+            <a:endParaRPr lang="ru-RU"/>
+          </a:p>
+        </p:txBody>
+      </p:sp>
+      <p:sp>
+        <p:nvSpPr>
+          <p:cNvPr id="13" name="Овал 12">
+            <a:extLst>
+              <a:ext uri="{FF2B5EF4-FFF2-40B4-BE49-F238E27FC236}">
+                <a16:creationId xmlns:a16="http://schemas.microsoft.com/office/drawing/2014/main" id="{3EA37454-C7C1-EF56-7736-6193E0BB7ADA}"/>
+              </a:ext>
+            </a:extLst>
+          </p:cNvPr>
+          <p:cNvSpPr/>
+          <p:nvPr/>
+        </p:nvSpPr>
+        <p:spPr>
+          <a:xfrm>
+            <a:off x="6726558" y="3972699"/>
+            <a:ext cx="210065" cy="210065"/>
+          </a:xfrm>
+          <a:prstGeom prst="ellipse">
+            <a:avLst/>
+          </a:prstGeom>
+          <a:solidFill>
+            <a:schemeClr val="bg2">
+              <a:lumMod val="75000"/>
+            </a:schemeClr>
+          </a:solidFill>
+          <a:ln>
+            <a:solidFill>
+              <a:schemeClr val="tx1">
+                <a:lumMod val="95000"/>
+                <a:lumOff val="5000"/>
+              </a:schemeClr>
+            </a:solidFill>
+          </a:ln>
+        </p:spPr>
+        <p:style>
+          <a:lnRef idx="2">
+            <a:schemeClr val="accent1">
+              <a:shade val="15000"/>
+            </a:schemeClr>
+          </a:lnRef>
+          <a:fillRef idx="1">
+            <a:schemeClr val="accent1"/>
+          </a:fillRef>
+          <a:effectRef idx="0">
+            <a:schemeClr val="accent1"/>
+          </a:effectRef>
+          <a:fontRef idx="minor">
+            <a:schemeClr val="lt1"/>
+          </a:fontRef>
+        </p:style>
+        <p:txBody>
+          <a:bodyPr rtlCol="0" anchor="ctr"/>
+          <a:lstStyle/>
+          <a:p>
+            <a:pPr algn="ctr"/>
+            <a:endParaRPr lang="ru-RU"/>
+          </a:p>
+        </p:txBody>
+      </p:sp>
+      <p:sp>
+        <p:nvSpPr>
+          <p:cNvPr id="14" name="Овал 13">
+            <a:extLst>
+              <a:ext uri="{FF2B5EF4-FFF2-40B4-BE49-F238E27FC236}">
+                <a16:creationId xmlns:a16="http://schemas.microsoft.com/office/drawing/2014/main" id="{94900891-A796-B462-2E54-F2D7B9C8D087}"/>
+              </a:ext>
+            </a:extLst>
+          </p:cNvPr>
+          <p:cNvSpPr/>
+          <p:nvPr/>
+        </p:nvSpPr>
+        <p:spPr>
+          <a:xfrm>
+            <a:off x="5725177" y="4621429"/>
+            <a:ext cx="210065" cy="210065"/>
+          </a:xfrm>
+          <a:prstGeom prst="ellipse">
+            <a:avLst/>
+          </a:prstGeom>
+          <a:solidFill>
+            <a:schemeClr val="bg2">
+              <a:lumMod val="75000"/>
+            </a:schemeClr>
+          </a:solidFill>
+          <a:ln>
+            <a:solidFill>
+              <a:schemeClr val="tx1">
+                <a:lumMod val="95000"/>
+                <a:lumOff val="5000"/>
+              </a:schemeClr>
+            </a:solidFill>
+          </a:ln>
+        </p:spPr>
+        <p:style>
+          <a:lnRef idx="2">
+            <a:schemeClr val="accent1">
+              <a:shade val="15000"/>
+            </a:schemeClr>
+          </a:lnRef>
+          <a:fillRef idx="1">
+            <a:schemeClr val="accent1"/>
+          </a:fillRef>
+          <a:effectRef idx="0">
+            <a:schemeClr val="accent1"/>
+          </a:effectRef>
+          <a:fontRef idx="minor">
+            <a:schemeClr val="lt1"/>
+          </a:fontRef>
+        </p:style>
+        <p:txBody>
+          <a:bodyPr rtlCol="0" anchor="ctr"/>
+          <a:lstStyle/>
+          <a:p>
+            <a:pPr algn="ctr"/>
+            <a:endParaRPr lang="ru-RU"/>
+          </a:p>
+        </p:txBody>
+      </p:sp>
+      <p:sp>
+        <p:nvSpPr>
+          <p:cNvPr id="15" name="Овал 14">
+            <a:extLst>
+              <a:ext uri="{FF2B5EF4-FFF2-40B4-BE49-F238E27FC236}">
+                <a16:creationId xmlns:a16="http://schemas.microsoft.com/office/drawing/2014/main" id="{C085BBDF-308F-DFB1-AFDE-FBF75BC1DD83}"/>
+              </a:ext>
+            </a:extLst>
+          </p:cNvPr>
+          <p:cNvSpPr/>
+          <p:nvPr/>
+        </p:nvSpPr>
+        <p:spPr>
+          <a:xfrm>
+            <a:off x="4723796" y="4621429"/>
+            <a:ext cx="210065" cy="210065"/>
+          </a:xfrm>
+          <a:prstGeom prst="ellipse">
+            <a:avLst/>
+          </a:prstGeom>
+          <a:solidFill>
+            <a:schemeClr val="bg2">
+              <a:lumMod val="75000"/>
+            </a:schemeClr>
+          </a:solidFill>
+          <a:ln>
+            <a:solidFill>
+              <a:schemeClr val="tx1">
+                <a:lumMod val="95000"/>
+                <a:lumOff val="5000"/>
+              </a:schemeClr>
+            </a:solidFill>
+          </a:ln>
+        </p:spPr>
+        <p:style>
+          <a:lnRef idx="2">
+            <a:schemeClr val="accent1">
+              <a:shade val="15000"/>
+            </a:schemeClr>
+          </a:lnRef>
+          <a:fillRef idx="1">
+            <a:schemeClr val="accent1"/>
+          </a:fillRef>
+          <a:effectRef idx="0">
+            <a:schemeClr val="accent1"/>
+          </a:effectRef>
+          <a:fontRef idx="minor">
+            <a:schemeClr val="lt1"/>
+          </a:fontRef>
+        </p:style>
+        <p:txBody>
+          <a:bodyPr rtlCol="0" anchor="ctr"/>
+          <a:lstStyle/>
+          <a:p>
+            <a:pPr algn="ctr"/>
+            <a:endParaRPr lang="ru-RU"/>
+          </a:p>
+        </p:txBody>
+      </p:sp>
+      <p:sp>
+        <p:nvSpPr>
+          <p:cNvPr id="16" name="Овал 15">
+            <a:extLst>
+              <a:ext uri="{FF2B5EF4-FFF2-40B4-BE49-F238E27FC236}">
+                <a16:creationId xmlns:a16="http://schemas.microsoft.com/office/drawing/2014/main" id="{C03B6B4C-76A4-ECB7-9979-2B60933D837A}"/>
+              </a:ext>
+            </a:extLst>
+          </p:cNvPr>
+          <p:cNvSpPr/>
+          <p:nvPr/>
+        </p:nvSpPr>
+        <p:spPr>
+          <a:xfrm>
+            <a:off x="6726558" y="4621430"/>
+            <a:ext cx="210065" cy="210065"/>
+          </a:xfrm>
+          <a:prstGeom prst="ellipse">
+            <a:avLst/>
+          </a:prstGeom>
+          <a:solidFill>
+            <a:schemeClr val="bg2">
+              <a:lumMod val="75000"/>
+            </a:schemeClr>
+          </a:solidFill>
+          <a:ln>
+            <a:solidFill>
+              <a:schemeClr val="tx1">
+                <a:lumMod val="95000"/>
+                <a:lumOff val="5000"/>
+              </a:schemeClr>
+            </a:solidFill>
+          </a:ln>
+        </p:spPr>
+        <p:style>
+          <a:lnRef idx="2">
+            <a:schemeClr val="accent1">
+              <a:shade val="15000"/>
+            </a:schemeClr>
+          </a:lnRef>
+          <a:fillRef idx="1">
+            <a:schemeClr val="accent1"/>
+          </a:fillRef>
+          <a:effectRef idx="0">
+            <a:schemeClr val="accent1"/>
+          </a:effectRef>
+          <a:fontRef idx="minor">
+            <a:schemeClr val="lt1"/>
+          </a:fontRef>
+        </p:style>
+        <p:txBody>
+          <a:bodyPr rtlCol="0" anchor="ctr"/>
+          <a:lstStyle/>
+          <a:p>
+            <a:pPr algn="ctr"/>
+            <a:endParaRPr lang="ru-RU"/>
+          </a:p>
+        </p:txBody>
+      </p:sp>
+      <p:sp>
+        <p:nvSpPr>
+          <p:cNvPr id="17" name="Прямоугольник 16">
+            <a:extLst>
+              <a:ext uri="{FF2B5EF4-FFF2-40B4-BE49-F238E27FC236}">
+                <a16:creationId xmlns:a16="http://schemas.microsoft.com/office/drawing/2014/main" id="{512EBC4D-A19A-F223-FF7B-07D6A60259B7}"/>
+              </a:ext>
+            </a:extLst>
+          </p:cNvPr>
+          <p:cNvSpPr/>
+          <p:nvPr/>
+        </p:nvSpPr>
+        <p:spPr>
+          <a:xfrm>
+            <a:off x="4511489" y="2366682"/>
+            <a:ext cx="625288" cy="2736477"/>
+          </a:xfrm>
+          <a:prstGeom prst="rect">
+            <a:avLst/>
+          </a:prstGeom>
+          <a:solidFill>
+            <a:srgbClr val="1C777C">
+              <a:alpha val="20000"/>
+            </a:srgbClr>
+          </a:solidFill>
+          <a:ln>
+            <a:solidFill>
+              <a:srgbClr val="1C777C"/>
+            </a:solidFill>
+          </a:ln>
+        </p:spPr>
+        <p:style>
+          <a:lnRef idx="2">
+            <a:schemeClr val="accent1">
+              <a:shade val="15000"/>
+            </a:schemeClr>
+          </a:lnRef>
+          <a:fillRef idx="1">
+            <a:schemeClr val="accent1"/>
+          </a:fillRef>
+          <a:effectRef idx="0">
+            <a:schemeClr val="accent1"/>
+          </a:effectRef>
+          <a:fontRef idx="minor">
+            <a:schemeClr val="lt1"/>
+          </a:fontRef>
+        </p:style>
+        <p:txBody>
+          <a:bodyPr rtlCol="0" anchor="ctr"/>
+          <a:lstStyle/>
+          <a:p>
+            <a:pPr algn="ctr"/>
+            <a:endParaRPr lang="ru-RU"/>
+          </a:p>
+        </p:txBody>
+      </p:sp>
+      <p:sp>
+        <p:nvSpPr>
+          <p:cNvPr id="18" name="Прямоугольник 17">
+            <a:extLst>
+              <a:ext uri="{FF2B5EF4-FFF2-40B4-BE49-F238E27FC236}">
+                <a16:creationId xmlns:a16="http://schemas.microsoft.com/office/drawing/2014/main" id="{1B5E0E7F-74A1-47E3-BC82-0C39ECC6B976}"/>
+              </a:ext>
+            </a:extLst>
+          </p:cNvPr>
+          <p:cNvSpPr/>
+          <p:nvPr/>
+        </p:nvSpPr>
+        <p:spPr>
+          <a:xfrm>
+            <a:off x="5517565" y="2366682"/>
+            <a:ext cx="625288" cy="2736477"/>
+          </a:xfrm>
+          <a:prstGeom prst="rect">
+            <a:avLst/>
+          </a:prstGeom>
+          <a:solidFill>
+            <a:schemeClr val="accent5">
+              <a:lumMod val="60000"/>
+              <a:lumOff val="40000"/>
+              <a:alpha val="20000"/>
+            </a:schemeClr>
+          </a:solidFill>
+          <a:ln>
+            <a:solidFill>
+              <a:schemeClr val="accent5">
+                <a:lumMod val="60000"/>
+                <a:lumOff val="40000"/>
+              </a:schemeClr>
+            </a:solidFill>
+          </a:ln>
+        </p:spPr>
+        <p:style>
+          <a:lnRef idx="2">
+            <a:schemeClr val="accent1">
+              <a:shade val="15000"/>
+            </a:schemeClr>
+          </a:lnRef>
+          <a:fillRef idx="1">
+            <a:schemeClr val="accent1"/>
+          </a:fillRef>
+          <a:effectRef idx="0">
+            <a:schemeClr val="accent1"/>
+          </a:effectRef>
+          <a:fontRef idx="minor">
+            <a:schemeClr val="lt1"/>
+          </a:fontRef>
+        </p:style>
+        <p:txBody>
+          <a:bodyPr rtlCol="0" anchor="ctr"/>
+          <a:lstStyle/>
+          <a:p>
+            <a:pPr algn="ctr"/>
+            <a:endParaRPr lang="ru-RU"/>
+          </a:p>
+        </p:txBody>
+      </p:sp>
+      <p:sp>
+        <p:nvSpPr>
+          <p:cNvPr id="19" name="Прямоугольник 18">
+            <a:extLst>
+              <a:ext uri="{FF2B5EF4-FFF2-40B4-BE49-F238E27FC236}">
+                <a16:creationId xmlns:a16="http://schemas.microsoft.com/office/drawing/2014/main" id="{C00ECBD3-29B2-F4AD-97F0-E474262D4573}"/>
+              </a:ext>
+            </a:extLst>
+          </p:cNvPr>
+          <p:cNvSpPr/>
+          <p:nvPr/>
+        </p:nvSpPr>
+        <p:spPr>
+          <a:xfrm>
+            <a:off x="6523641" y="2366681"/>
+            <a:ext cx="625288" cy="2736477"/>
+          </a:xfrm>
+          <a:prstGeom prst="rect">
+            <a:avLst/>
+          </a:prstGeom>
+          <a:solidFill>
+            <a:srgbClr val="002060">
+              <a:alpha val="20000"/>
+            </a:srgbClr>
+          </a:solidFill>
+          <a:ln>
+            <a:solidFill>
+              <a:srgbClr val="0070C0"/>
+            </a:solidFill>
+          </a:ln>
+        </p:spPr>
+        <p:style>
+          <a:lnRef idx="2">
+            <a:schemeClr val="accent1">
+              <a:shade val="15000"/>
+            </a:schemeClr>
+          </a:lnRef>
+          <a:fillRef idx="1">
+            <a:schemeClr val="accent1"/>
+          </a:fillRef>
+          <a:effectRef idx="0">
+            <a:schemeClr val="accent1"/>
+          </a:effectRef>
+          <a:fontRef idx="minor">
+            <a:schemeClr val="lt1"/>
+          </a:fontRef>
+        </p:style>
+        <p:txBody>
+          <a:bodyPr rtlCol="0" anchor="ctr"/>
+          <a:lstStyle/>
+          <a:p>
+            <a:pPr algn="ctr"/>
+            <a:endParaRPr lang="ru-RU"/>
+          </a:p>
+        </p:txBody>
+      </p:sp>
+      <p:sp>
+        <p:nvSpPr>
+          <p:cNvPr id="20" name="Прямоугольник 19">
+            <a:extLst>
+              <a:ext uri="{FF2B5EF4-FFF2-40B4-BE49-F238E27FC236}">
+                <a16:creationId xmlns:a16="http://schemas.microsoft.com/office/drawing/2014/main" id="{7A5370BB-3BFA-5039-A3AA-C0FF79D8B4D9}"/>
+              </a:ext>
+            </a:extLst>
+          </p:cNvPr>
+          <p:cNvSpPr/>
+          <p:nvPr/>
+        </p:nvSpPr>
+        <p:spPr>
+          <a:xfrm>
+            <a:off x="4294594" y="2502700"/>
+            <a:ext cx="2016741" cy="1198334"/>
+          </a:xfrm>
+          <a:prstGeom prst="rect">
+            <a:avLst/>
+          </a:prstGeom>
+          <a:solidFill>
+            <a:schemeClr val="tx1">
+              <a:lumMod val="75000"/>
+              <a:lumOff val="25000"/>
+              <a:alpha val="20000"/>
+            </a:schemeClr>
+          </a:solidFill>
+          <a:ln>
+            <a:noFill/>
+          </a:ln>
+        </p:spPr>
+        <p:style>
+          <a:lnRef idx="2">
+            <a:schemeClr val="accent1">
+              <a:shade val="15000"/>
+            </a:schemeClr>
+          </a:lnRef>
+          <a:fillRef idx="1">
+            <a:schemeClr val="accent1"/>
+          </a:fillRef>
+          <a:effectRef idx="0">
+            <a:schemeClr val="accent1"/>
+          </a:effectRef>
+          <a:fontRef idx="minor">
+            <a:schemeClr val="lt1"/>
+          </a:fontRef>
+        </p:style>
+        <p:txBody>
+          <a:bodyPr rtlCol="0" anchor="ctr"/>
+          <a:lstStyle/>
+          <a:p>
+            <a:pPr algn="ctr"/>
+            <a:endParaRPr lang="ru-RU"/>
+          </a:p>
+        </p:txBody>
+      </p:sp>
+      <p:sp>
+        <p:nvSpPr>
+          <p:cNvPr id="22" name="Прямоугольник 21">
+            <a:extLst>
+              <a:ext uri="{FF2B5EF4-FFF2-40B4-BE49-F238E27FC236}">
+                <a16:creationId xmlns:a16="http://schemas.microsoft.com/office/drawing/2014/main" id="{ADBF5C4E-FA24-E19D-DC4A-0DB03B4296C0}"/>
+              </a:ext>
+            </a:extLst>
+          </p:cNvPr>
+          <p:cNvSpPr/>
+          <p:nvPr/>
+        </p:nvSpPr>
+        <p:spPr>
+          <a:xfrm>
+            <a:off x="5399729" y="3085100"/>
+            <a:ext cx="916302" cy="1198334"/>
+          </a:xfrm>
+          <a:prstGeom prst="rect">
+            <a:avLst/>
+          </a:prstGeom>
+          <a:solidFill>
+            <a:schemeClr val="tx1">
+              <a:lumMod val="75000"/>
+              <a:lumOff val="25000"/>
+              <a:alpha val="20000"/>
+            </a:schemeClr>
+          </a:solidFill>
+          <a:ln>
+            <a:noFill/>
+          </a:ln>
+        </p:spPr>
+        <p:style>
+          <a:lnRef idx="2">
+            <a:schemeClr val="accent1">
+              <a:shade val="15000"/>
+            </a:schemeClr>
+          </a:lnRef>
+          <a:fillRef idx="1">
+            <a:schemeClr val="accent1"/>
+          </a:fillRef>
+          <a:effectRef idx="0">
+            <a:schemeClr val="accent1"/>
+          </a:effectRef>
+          <a:fontRef idx="minor">
+            <a:schemeClr val="lt1"/>
+          </a:fontRef>
+        </p:style>
+        <p:txBody>
+          <a:bodyPr rtlCol="0" anchor="ctr"/>
+          <a:lstStyle/>
+          <a:p>
+            <a:pPr algn="ctr"/>
+            <a:endParaRPr lang="ru-RU"/>
+          </a:p>
+        </p:txBody>
+      </p:sp>
+      <p:sp>
+        <p:nvSpPr>
+          <p:cNvPr id="23" name="Прямоугольник 22">
+            <a:extLst>
+              <a:ext uri="{FF2B5EF4-FFF2-40B4-BE49-F238E27FC236}">
+                <a16:creationId xmlns:a16="http://schemas.microsoft.com/office/drawing/2014/main" id="{B4BFBB6C-BB03-26C8-AF6B-44119DE96DCC}"/>
+              </a:ext>
+            </a:extLst>
+          </p:cNvPr>
+          <p:cNvSpPr/>
+          <p:nvPr/>
+        </p:nvSpPr>
+        <p:spPr>
+          <a:xfrm>
+            <a:off x="6314002" y="3085100"/>
+            <a:ext cx="1001198" cy="615934"/>
+          </a:xfrm>
+          <a:prstGeom prst="rect">
+            <a:avLst/>
+          </a:prstGeom>
+          <a:solidFill>
+            <a:schemeClr val="tx1">
+              <a:lumMod val="75000"/>
+              <a:lumOff val="25000"/>
+              <a:alpha val="20000"/>
+            </a:schemeClr>
+          </a:solidFill>
+          <a:ln>
+            <a:noFill/>
+          </a:ln>
+        </p:spPr>
+        <p:style>
+          <a:lnRef idx="2">
+            <a:schemeClr val="accent1">
+              <a:shade val="15000"/>
+            </a:schemeClr>
+          </a:lnRef>
+          <a:fillRef idx="1">
+            <a:schemeClr val="accent1"/>
+          </a:fillRef>
+          <a:effectRef idx="0">
+            <a:schemeClr val="accent1"/>
+          </a:effectRef>
+          <a:fontRef idx="minor">
+            <a:schemeClr val="lt1"/>
+          </a:fontRef>
+        </p:style>
+        <p:txBody>
+          <a:bodyPr rtlCol="0" anchor="ctr"/>
+          <a:lstStyle/>
+          <a:p>
+            <a:pPr algn="ctr"/>
+            <a:endParaRPr lang="ru-RU"/>
+          </a:p>
+        </p:txBody>
+      </p:sp>
+      <p:sp>
+        <p:nvSpPr>
+          <p:cNvPr id="25" name="Прямоугольник 24">
+            <a:extLst>
+              <a:ext uri="{FF2B5EF4-FFF2-40B4-BE49-F238E27FC236}">
+                <a16:creationId xmlns:a16="http://schemas.microsoft.com/office/drawing/2014/main" id="{42919883-C3E9-CC88-1E57-C24D25E01245}"/>
+              </a:ext>
+            </a:extLst>
+          </p:cNvPr>
+          <p:cNvSpPr/>
+          <p:nvPr/>
+        </p:nvSpPr>
+        <p:spPr>
+          <a:xfrm>
+            <a:off x="6394472" y="2502699"/>
+            <a:ext cx="920728" cy="505855"/>
+          </a:xfrm>
+          <a:prstGeom prst="rect">
+            <a:avLst/>
+          </a:prstGeom>
+          <a:solidFill>
+            <a:schemeClr val="tx1">
+              <a:lumMod val="75000"/>
+              <a:lumOff val="25000"/>
+              <a:alpha val="20000"/>
+            </a:schemeClr>
+          </a:solidFill>
+          <a:ln>
+            <a:noFill/>
+          </a:ln>
+        </p:spPr>
+        <p:style>
+          <a:lnRef idx="2">
+            <a:schemeClr val="accent1">
+              <a:shade val="15000"/>
+            </a:schemeClr>
+          </a:lnRef>
+          <a:fillRef idx="1">
+            <a:schemeClr val="accent1"/>
+          </a:fillRef>
+          <a:effectRef idx="0">
+            <a:schemeClr val="accent1"/>
+          </a:effectRef>
+          <a:fontRef idx="minor">
+            <a:schemeClr val="lt1"/>
+          </a:fontRef>
+        </p:style>
+        <p:txBody>
+          <a:bodyPr rtlCol="0" anchor="ctr"/>
+          <a:lstStyle/>
+          <a:p>
+            <a:pPr algn="ctr"/>
+            <a:endParaRPr lang="ru-RU"/>
+          </a:p>
+        </p:txBody>
+      </p:sp>
+      <p:sp>
+        <p:nvSpPr>
+          <p:cNvPr id="26" name="Прямоугольник 25">
+            <a:extLst>
+              <a:ext uri="{FF2B5EF4-FFF2-40B4-BE49-F238E27FC236}">
+                <a16:creationId xmlns:a16="http://schemas.microsoft.com/office/drawing/2014/main" id="{04C0AB78-A195-E6AC-14A4-D0E6B31FB750}"/>
+              </a:ext>
+            </a:extLst>
+          </p:cNvPr>
+          <p:cNvSpPr/>
+          <p:nvPr/>
+        </p:nvSpPr>
+        <p:spPr>
+          <a:xfrm>
+            <a:off x="4294594" y="3759455"/>
+            <a:ext cx="3020606" cy="531159"/>
+          </a:xfrm>
+          <a:prstGeom prst="rect">
+            <a:avLst/>
+          </a:prstGeom>
+          <a:solidFill>
+            <a:schemeClr val="tx1">
+              <a:lumMod val="75000"/>
+              <a:lumOff val="25000"/>
+              <a:alpha val="20000"/>
+            </a:schemeClr>
+          </a:solidFill>
+          <a:ln>
+            <a:noFill/>
+          </a:ln>
+        </p:spPr>
+        <p:style>
+          <a:lnRef idx="2">
+            <a:schemeClr val="accent1">
+              <a:shade val="15000"/>
+            </a:schemeClr>
+          </a:lnRef>
+          <a:fillRef idx="1">
+            <a:schemeClr val="accent1"/>
+          </a:fillRef>
+          <a:effectRef idx="0">
+            <a:schemeClr val="accent1"/>
+          </a:effectRef>
+          <a:fontRef idx="minor">
+            <a:schemeClr val="lt1"/>
+          </a:fontRef>
+        </p:style>
+        <p:txBody>
+          <a:bodyPr rtlCol="0" anchor="ctr"/>
+          <a:lstStyle/>
+          <a:p>
+            <a:pPr algn="ctr"/>
+            <a:endParaRPr lang="ru-RU"/>
+          </a:p>
+        </p:txBody>
+      </p:sp>
+      <p:sp>
+        <p:nvSpPr>
+          <p:cNvPr id="21" name="Заголовок 1">
+            <a:extLst>
+              <a:ext uri="{FF2B5EF4-FFF2-40B4-BE49-F238E27FC236}">
+                <a16:creationId xmlns:a16="http://schemas.microsoft.com/office/drawing/2014/main" id="{C0EBD24A-7F31-8971-4D22-B009549423CC}"/>
+              </a:ext>
+            </a:extLst>
+          </p:cNvPr>
+          <p:cNvSpPr txBox="1">
+            <a:spLocks/>
+          </p:cNvSpPr>
+          <p:nvPr/>
+        </p:nvSpPr>
+        <p:spPr>
+          <a:xfrm>
+            <a:off x="1055688" y="728664"/>
+            <a:ext cx="10080625" cy="705690"/>
+          </a:xfrm>
+          <a:prstGeom prst="rect">
+            <a:avLst/>
+          </a:prstGeom>
+        </p:spPr>
+        <p:txBody>
+          <a:bodyPr vert="horz" lIns="91440" tIns="45720" rIns="91440" bIns="45720" rtlCol="0" anchor="ctr">
+            <a:normAutofit/>
+          </a:bodyPr>
+          <a:lstStyle>
+            <a:lvl1pPr algn="l" defTabSz="914400" rtl="0" eaLnBrk="1" latinLnBrk="0" hangingPunct="1">
+              <a:lnSpc>
+                <a:spcPct val="90000"/>
+              </a:lnSpc>
+              <a:spcBef>
+                <a:spcPct val="0"/>
+              </a:spcBef>
+              <a:buNone/>
+              <a:defRPr sz="4400" kern="1200">
+                <a:solidFill>
+                  <a:schemeClr val="tx1"/>
+                </a:solidFill>
+                <a:latin typeface="+mj-lt"/>
+                <a:ea typeface="+mj-ea"/>
+                <a:cs typeface="+mj-cs"/>
+              </a:defRPr>
+            </a:lvl1pPr>
+          </a:lstStyle>
+          <a:p>
+            <a:r>
+              <a:rPr lang="ru-RU"/>
+              <a:t>Минимальное покрытие множеств</a:t>
+            </a:r>
+            <a:endParaRPr lang="ru-RU" dirty="0"/>
+          </a:p>
+        </p:txBody>
+      </p:sp>
+    </p:spTree>
+    <p:extLst>
+      <p:ext uri="{BB962C8B-B14F-4D97-AF65-F5344CB8AC3E}">
+        <p14:creationId xmlns:p14="http://schemas.microsoft.com/office/powerpoint/2010/main" val="1604028254"/>
+      </p:ext>
+    </p:extLst>
+  </p:cSld>
+  <p:clrMapOvr>
+    <a:masterClrMapping/>
+  </p:clrMapOvr>
+</p:sld>
+</file>
+
+<file path=ppt/slides/slide18.xml><?xml version="1.0" encoding="utf-8"?>
+<p:sld xmlns:a="http://schemas.openxmlformats.org/drawingml/2006/main" xmlns:r="http://schemas.openxmlformats.org/officeDocument/2006/relationships" xmlns:p="http://schemas.openxmlformats.org/presentationml/2006/main">
+  <p:cSld>
+    <p:spTree>
+      <p:nvGrpSpPr>
+        <p:cNvPr id="1" name=""/>
+        <p:cNvGrpSpPr/>
+        <p:nvPr/>
+      </p:nvGrpSpPr>
+      <p:grpSpPr>
+        <a:xfrm>
+          <a:off x="0" y="0"/>
+          <a:ext cx="0" cy="0"/>
+          <a:chOff x="0" y="0"/>
+          <a:chExt cx="0" cy="0"/>
+        </a:xfrm>
+      </p:grpSpPr>
+      <p:sp>
+        <p:nvSpPr>
+          <p:cNvPr id="2" name="Заголовок 1">
+            <a:extLst>
+              <a:ext uri="{FF2B5EF4-FFF2-40B4-BE49-F238E27FC236}">
+                <a16:creationId xmlns:a16="http://schemas.microsoft.com/office/drawing/2014/main" id="{0B9F9ED2-E623-F791-924E-5C5AE9C12D8F}"/>
+              </a:ext>
+            </a:extLst>
+          </p:cNvPr>
+          <p:cNvSpPr>
+            <a:spLocks noGrp="1"/>
+          </p:cNvSpPr>
+          <p:nvPr>
+            <p:ph type="title"/>
+          </p:nvPr>
+        </p:nvSpPr>
+        <p:spPr>
+          <a:xfrm>
+            <a:off x="1055688" y="728664"/>
+            <a:ext cx="10080625" cy="705690"/>
+          </a:xfrm>
+        </p:spPr>
+        <p:txBody>
+          <a:bodyPr/>
+          <a:lstStyle/>
+          <a:p>
+            <a:r>
+              <a:rPr lang="ru-RU" dirty="0"/>
+              <a:t>Минимальное покрытие множеств</a:t>
+            </a:r>
+          </a:p>
+        </p:txBody>
+      </p:sp>
+      <p:pic>
+        <p:nvPicPr>
+          <p:cNvPr id="3" name="Рисунок 2">
+            <a:extLst>
+              <a:ext uri="{FF2B5EF4-FFF2-40B4-BE49-F238E27FC236}">
+                <a16:creationId xmlns:a16="http://schemas.microsoft.com/office/drawing/2014/main" id="{939FBBFA-7D6C-A1E9-9A6F-4C0E77D87BB4}"/>
+              </a:ext>
+            </a:extLst>
+          </p:cNvPr>
+          <p:cNvPicPr>
+            <a:picLocks noChangeAspect="1"/>
+          </p:cNvPicPr>
+          <p:nvPr/>
+        </p:nvPicPr>
+        <p:blipFill>
+          <a:blip r:embed="rId2">
+            <a:extLst>
+              <a:ext uri="{28A0092B-C50C-407E-A947-70E740481C1C}">
+                <a14:useLocalDpi xmlns:a14="http://schemas.microsoft.com/office/drawing/2010/main" val="0"/>
+              </a:ext>
+            </a:extLst>
+          </a:blip>
+          <a:stretch>
+            <a:fillRect/>
+          </a:stretch>
+        </p:blipFill>
+        <p:spPr>
+          <a:xfrm>
+            <a:off x="0" y="1805449"/>
+            <a:ext cx="4870388" cy="3932725"/>
+          </a:xfrm>
+          <a:prstGeom prst="rect">
+            <a:avLst/>
+          </a:prstGeom>
+        </p:spPr>
+      </p:pic>
+      <p:pic>
+        <p:nvPicPr>
+          <p:cNvPr id="5" name="Рисунок 4">
+            <a:extLst>
+              <a:ext uri="{FF2B5EF4-FFF2-40B4-BE49-F238E27FC236}">
+                <a16:creationId xmlns:a16="http://schemas.microsoft.com/office/drawing/2014/main" id="{619CD0B8-1CAA-7A07-EEB4-267FE20102F3}"/>
+              </a:ext>
+            </a:extLst>
+          </p:cNvPr>
+          <p:cNvPicPr>
+            <a:picLocks noChangeAspect="1"/>
+          </p:cNvPicPr>
+          <p:nvPr/>
+        </p:nvPicPr>
+        <p:blipFill>
+          <a:blip r:embed="rId3">
+            <a:extLst>
+              <a:ext uri="{28A0092B-C50C-407E-A947-70E740481C1C}">
+                <a14:useLocalDpi xmlns:a14="http://schemas.microsoft.com/office/drawing/2010/main" val="0"/>
+              </a:ext>
+            </a:extLst>
+          </a:blip>
+          <a:stretch>
+            <a:fillRect/>
+          </a:stretch>
+        </p:blipFill>
+        <p:spPr>
+          <a:xfrm>
+            <a:off x="4069978" y="2109376"/>
+            <a:ext cx="3708604" cy="3521222"/>
+          </a:xfrm>
+          <a:prstGeom prst="rect">
+            <a:avLst/>
+          </a:prstGeom>
+        </p:spPr>
+      </p:pic>
+      <p:pic>
+        <p:nvPicPr>
+          <p:cNvPr id="8" name="Рисунок 7">
+            <a:extLst>
+              <a:ext uri="{FF2B5EF4-FFF2-40B4-BE49-F238E27FC236}">
+                <a16:creationId xmlns:a16="http://schemas.microsoft.com/office/drawing/2014/main" id="{015B16C3-2497-801E-36C1-A824B129224A}"/>
+              </a:ext>
+            </a:extLst>
+          </p:cNvPr>
+          <p:cNvPicPr>
+            <a:picLocks noChangeAspect="1"/>
+          </p:cNvPicPr>
+          <p:nvPr/>
+        </p:nvPicPr>
+        <p:blipFill>
+          <a:blip r:embed="rId4">
+            <a:extLst>
+              <a:ext uri="{28A0092B-C50C-407E-A947-70E740481C1C}">
+                <a14:useLocalDpi xmlns:a14="http://schemas.microsoft.com/office/drawing/2010/main" val="0"/>
+              </a:ext>
+            </a:extLst>
+          </a:blip>
+          <a:stretch>
+            <a:fillRect/>
+          </a:stretch>
+        </p:blipFill>
+        <p:spPr>
+          <a:xfrm>
+            <a:off x="7548283" y="2109376"/>
+            <a:ext cx="4123764" cy="3732457"/>
+          </a:xfrm>
+          <a:prstGeom prst="rect">
+            <a:avLst/>
+          </a:prstGeom>
+        </p:spPr>
+      </p:pic>
+    </p:spTree>
+    <p:extLst>
+      <p:ext uri="{BB962C8B-B14F-4D97-AF65-F5344CB8AC3E}">
+        <p14:creationId xmlns:p14="http://schemas.microsoft.com/office/powerpoint/2010/main" val="155397901"/>
       </p:ext>
     </p:extLst>
   </p:cSld>
@@ -7512,67 +7800,79 @@
           </a:bodyPr>
           <a:lstStyle/>
           <a:p>
-            <a:pPr marL="0" indent="0">
+            <a:pPr marL="457200" indent="-457200">
               <a:lnSpc>
                 <a:spcPct val="100000"/>
               </a:lnSpc>
-              <a:buNone/>
+              <a:buFont typeface="+mj-lt"/>
+              <a:buAutoNum type="arabicPeriod"/>
             </a:pPr>
             <a:r>
-              <a:rPr lang="ru-RU" sz="2400" dirty="0"/>
-              <a:t>Александер Д., Стоун М. Доказательства из Книги. Лучшие доказательства со времен Евклида до наших дней: пер. с англ.–М.: Мир, 2006. – 256 с.</a:t>
-            </a:r>
-          </a:p>
-          <a:p>
-            <a:pPr marL="0" indent="0">
+              <a:rPr lang="en-US" sz="2400" dirty="0"/>
+              <a:t>Shermer T. C. Recent results in art galleries (geometry) //Proceedings of the IEEE. – 1992. – Т. 80. – №. 9. – С. 1384-1399.</a:t>
+            </a:r>
+          </a:p>
+          <a:p>
+            <a:pPr marL="457200" indent="-457200">
               <a:lnSpc>
                 <a:spcPct val="100000"/>
               </a:lnSpc>
-              <a:buNone/>
+              <a:buFont typeface="+mj-lt"/>
+              <a:buAutoNum type="arabicPeriod"/>
             </a:pPr>
             <a:r>
-              <a:rPr lang="ru-RU" sz="2400" dirty="0"/>
-              <a:t>О'Рурк, Дж.; Суповит, К. Некоторые результаты теории информации / Дж. О'Рурк, К. Суповит // </a:t>
-            </a:r>
-            <a:r>
               <a:rPr lang="en-US" sz="2400" dirty="0"/>
-              <a:t>IEEE Transactions on Information Theory. – 1983. – </a:t>
-            </a:r>
-            <a:r>
-              <a:rPr lang="ru-RU" sz="2400" dirty="0"/>
-              <a:t>Т. 29, № 2. – С. 181–190. – </a:t>
-            </a:r>
-            <a:r>
+              <a:t>Lee D., Lin A. Computational complexity of art gallery problems //IEEE Transactions on Information Theory. – 1986. – Т. 32. – №. 2. – С. 276-282.</a:t>
+            </a:r>
+            <a:br>
               <a:rPr lang="en-US" sz="2400" dirty="0"/>
-              <a:t>DOI: 10.1109/TIT.1983.1056648.</a:t>
-            </a:r>
-          </a:p>
-          <a:p>
-            <a:pPr marL="0" indent="0">
+            </a:br>
+            <a:r>
+              <a:rPr lang="en-US" sz="2400" dirty="0"/>
+              <a:t>Maleki S., </a:t>
+            </a:r>
+            <a:r>
+              <a:rPr lang="en-US" sz="2400" dirty="0" err="1"/>
+              <a:t>Mohades</a:t>
+            </a:r>
+            <a:r>
+              <a:rPr lang="en-US" sz="2400" dirty="0"/>
+              <a:t> A. Implementation of polygon guarding algorithms for art gallery problems //</a:t>
+            </a:r>
+            <a:r>
+              <a:rPr lang="en-US" sz="2400" dirty="0" err="1"/>
+              <a:t>arXiv</a:t>
+            </a:r>
+            <a:r>
+              <a:rPr lang="en-US" sz="2400" dirty="0"/>
+              <a:t> preprint arXiv:2201.03535. – 2022.</a:t>
+            </a:r>
+            <a:endParaRPr lang="ru-RU" sz="2400" dirty="0"/>
+          </a:p>
+          <a:p>
+            <a:pPr marL="457200" indent="-457200">
               <a:lnSpc>
                 <a:spcPct val="100000"/>
               </a:lnSpc>
-              <a:buNone/>
+              <a:buFont typeface="+mj-lt"/>
+              <a:buAutoNum type="arabicPeriod"/>
             </a:pPr>
             <a:r>
-              <a:rPr lang="ru-RU" sz="2400" dirty="0"/>
-              <a:t>О’Рурк Дж. </a:t>
-            </a:r>
-            <a:r>
               <a:rPr lang="en-US" sz="2400" dirty="0"/>
-              <a:t>Computational Geometry in C. </a:t>
-            </a:r>
-            <a:r>
-              <a:rPr lang="ru-RU" sz="2400" dirty="0"/>
-              <a:t>Второе издание. – </a:t>
-            </a:r>
+              <a:t>Ghosh S. K. Approximation algorithms for art gallery problems in polygons //Discrete Applied Mathematics. – 2010. – Т. 158. – №. 6. – С. 718-722.</a:t>
+            </a:r>
+          </a:p>
+          <a:p>
+            <a:pPr marL="457200" indent="-457200">
+              <a:lnSpc>
+                <a:spcPct val="100000"/>
+              </a:lnSpc>
+              <a:buFont typeface="+mj-lt"/>
+              <a:buAutoNum type="arabicPeriod"/>
+            </a:pPr>
             <a:r>
               <a:rPr lang="en-US" sz="2400" dirty="0"/>
-              <a:t>Cambridge: Cambridge University Press, 1998. – 376 </a:t>
-            </a:r>
-            <a:r>
-              <a:rPr lang="ru-RU" sz="2400" dirty="0"/>
-              <a:t>с.</a:t>
+              <a:t>Ghosh S. K. Visibility algorithms in the plane. – Cambridge university press, 2007.</a:t>
             </a:r>
           </a:p>
         </p:txBody>
@@ -7580,7 +7880,7 @@
     </p:spTree>
     <p:extLst>
       <p:ext uri="{BB962C8B-B14F-4D97-AF65-F5344CB8AC3E}">
-        <p14:creationId xmlns:p14="http://schemas.microsoft.com/office/powerpoint/2010/main" val="2362857893"/>
+        <p14:creationId xmlns:p14="http://schemas.microsoft.com/office/powerpoint/2010/main" val="4088426325"/>
       </p:ext>
     </p:extLst>
   </p:cSld>
@@ -7689,63 +7989,263 @@
           </a:bodyPr>
           <a:lstStyle/>
           <a:p>
-            <a:pPr marL="0" indent="0">
+            <a:pPr marL="457200" indent="-457200">
               <a:lnSpc>
                 <a:spcPct val="100000"/>
               </a:lnSpc>
-              <a:buNone/>
+              <a:buFont typeface="+mj-lt"/>
+              <a:buAutoNum type="arabicPeriod" startAt="5"/>
             </a:pPr>
             <a:r>
               <a:rPr lang="ru-RU" sz="2400" dirty="0"/>
-              <a:t>О’Рурк Дж. Теоремы и алгоритмы о художественной галерее: монография / Джозеф О’Рурк. – Нью-Йорк: </a:t>
-            </a:r>
-            <a:r>
-              <a:rPr lang="en-US" sz="2400" dirty="0"/>
-              <a:t>Oxford University Press, 1987. – 280 </a:t>
+              <a:t>Айгнер М., </a:t>
+            </a:r>
+            <a:r>
+              <a:rPr lang="ru-RU" sz="2400" dirty="0" err="1"/>
+              <a:t>Циглер</a:t>
             </a:r>
             <a:r>
               <a:rPr lang="ru-RU" sz="2400" dirty="0"/>
-              <a:t>с. – (Международная серия монографий по компьютерным наукам).</a:t>
-            </a:r>
-          </a:p>
-          <a:p>
-            <a:pPr marL="0" indent="0">
+              <a:t> Г. Доказательства из Книги. Лучшие доказательства со времен Евклида до наших дней. – 2006.</a:t>
+            </a:r>
+          </a:p>
+          <a:p>
+            <a:pPr marL="457200" indent="-457200">
               <a:lnSpc>
                 <a:spcPct val="100000"/>
               </a:lnSpc>
-              <a:buNone/>
+              <a:buFont typeface="+mj-lt"/>
+              <a:buAutoNum type="arabicPeriod" startAt="5"/>
             </a:pPr>
             <a:r>
-              <a:rPr lang="ru-RU" sz="2400" dirty="0"/>
-              <a:t>Шермер Т.К. Последние результаты о художественных галереях / Томас К. Шермер. – </a:t>
-            </a:r>
-            <a:r>
               <a:rPr lang="en-US" sz="2400" dirty="0"/>
-              <a:t>Proceedings of the IEEE, 1992. – 280 </a:t>
-            </a:r>
-            <a:r>
-              <a:rPr lang="ru-RU" sz="2400" dirty="0"/>
-              <a:t>с.</a:t>
-            </a:r>
-          </a:p>
-          <a:p>
-            <a:pPr marL="0" indent="0">
+              <a:t>O'Rourke J., </a:t>
+            </a:r>
+            <a:r>
+              <a:rPr lang="en-US" sz="2400" dirty="0" err="1"/>
+              <a:t>Supowit</a:t>
+            </a:r>
+            <a:r>
+              <a:rPr lang="en-US" sz="2400" dirty="0"/>
+              <a:t> K. Some NP-hard polygon decomposition problems //IEEE Transactions on Information Theory. – 1983. – Т. 29. – №. 2. – С. 181-190.</a:t>
+            </a:r>
+          </a:p>
+          <a:p>
+            <a:pPr marL="457200" indent="-457200">
               <a:lnSpc>
                 <a:spcPct val="100000"/>
               </a:lnSpc>
-              <a:buNone/>
+              <a:buFont typeface="+mj-lt"/>
+              <a:buAutoNum type="arabicPeriod" startAt="5"/>
             </a:pPr>
             <a:r>
               <a:rPr lang="ru-RU" sz="2400" dirty="0"/>
-              <a:t>Хертель С., Мельхорн К. (1985). Быстрая триангуляция плоскости относительно простых многоугольников.</a:t>
-            </a:r>
+              <a:t>О’Рурк Дж. </a:t>
+            </a:r>
+            <a:r>
+              <a:rPr lang="en-US" sz="2400" dirty="0"/>
+              <a:t>Computational Geometry in C. </a:t>
+            </a:r>
+            <a:r>
+              <a:rPr lang="ru-RU" sz="2400" dirty="0"/>
+              <a:t>Второе издание. – </a:t>
+            </a:r>
+            <a:r>
+              <a:rPr lang="en-US" sz="2400" dirty="0"/>
+              <a:t>Cambridge: Cambridge University Press, 1998. – 376 </a:t>
+            </a:r>
+            <a:r>
+              <a:rPr lang="ru-RU" sz="2400" dirty="0"/>
+              <a:t>с.</a:t>
+            </a:r>
+            <a:br>
+              <a:rPr lang="en-US" sz="2400" dirty="0"/>
+            </a:br>
+            <a:r>
+              <a:rPr lang="en-US" sz="2400" dirty="0" err="1"/>
+              <a:t>O'rourke</a:t>
+            </a:r>
+            <a:r>
+              <a:rPr lang="en-US" sz="2400" dirty="0"/>
+              <a:t> J. Art gallery theorems and algorithms. – Oxford University Press, Inc., 1987.</a:t>
+            </a:r>
+          </a:p>
+          <a:p>
+            <a:pPr marL="457200" indent="-457200">
+              <a:lnSpc>
+                <a:spcPct val="100000"/>
+              </a:lnSpc>
+              <a:buFont typeface="+mj-lt"/>
+              <a:buAutoNum type="arabicPeriod" startAt="5"/>
+            </a:pPr>
+            <a:endParaRPr lang="ru-RU" sz="2400" dirty="0"/>
           </a:p>
         </p:txBody>
       </p:sp>
     </p:spTree>
     <p:extLst>
       <p:ext uri="{BB962C8B-B14F-4D97-AF65-F5344CB8AC3E}">
-        <p14:creationId xmlns:p14="http://schemas.microsoft.com/office/powerpoint/2010/main" val="653754563"/>
+        <p14:creationId xmlns:p14="http://schemas.microsoft.com/office/powerpoint/2010/main" val="2362857893"/>
+      </p:ext>
+    </p:extLst>
+  </p:cSld>
+  <p:clrMapOvr>
+    <a:masterClrMapping/>
+  </p:clrMapOvr>
+</p:sld>
+</file>
+
+<file path=ppt/slides/slide22.xml><?xml version="1.0" encoding="utf-8"?>
+<p:sld xmlns:a="http://schemas.openxmlformats.org/drawingml/2006/main" xmlns:r="http://schemas.openxmlformats.org/officeDocument/2006/relationships" xmlns:p="http://schemas.openxmlformats.org/presentationml/2006/main">
+  <p:cSld>
+    <p:spTree>
+      <p:nvGrpSpPr>
+        <p:cNvPr id="1" name=""/>
+        <p:cNvGrpSpPr/>
+        <p:nvPr/>
+      </p:nvGrpSpPr>
+      <p:grpSpPr>
+        <a:xfrm>
+          <a:off x="0" y="0"/>
+          <a:ext cx="0" cy="0"/>
+          <a:chOff x="0" y="0"/>
+          <a:chExt cx="0" cy="0"/>
+        </a:xfrm>
+      </p:grpSpPr>
+      <p:sp>
+        <p:nvSpPr>
+          <p:cNvPr id="4" name="Заголовок 1">
+            <a:extLst>
+              <a:ext uri="{FF2B5EF4-FFF2-40B4-BE49-F238E27FC236}">
+                <a16:creationId xmlns:a16="http://schemas.microsoft.com/office/drawing/2014/main" id="{596CC66C-666A-C920-E1EC-DD9D506E70EB}"/>
+              </a:ext>
+            </a:extLst>
+          </p:cNvPr>
+          <p:cNvSpPr txBox="1">
+            <a:spLocks/>
+          </p:cNvSpPr>
+          <p:nvPr/>
+        </p:nvSpPr>
+        <p:spPr>
+          <a:xfrm>
+            <a:off x="1055688" y="728664"/>
+            <a:ext cx="10080625" cy="705690"/>
+          </a:xfrm>
+          <a:prstGeom prst="rect">
+            <a:avLst/>
+          </a:prstGeom>
+        </p:spPr>
+        <p:txBody>
+          <a:bodyPr vert="horz" lIns="91440" tIns="45720" rIns="91440" bIns="45720" rtlCol="0" anchor="ctr">
+            <a:normAutofit/>
+          </a:bodyPr>
+          <a:lstStyle>
+            <a:lvl1pPr algn="l" defTabSz="914400" rtl="0" eaLnBrk="1" latinLnBrk="0" hangingPunct="1">
+              <a:lnSpc>
+                <a:spcPct val="90000"/>
+              </a:lnSpc>
+              <a:spcBef>
+                <a:spcPct val="0"/>
+              </a:spcBef>
+              <a:buNone/>
+              <a:defRPr sz="4400" kern="1200">
+                <a:solidFill>
+                  <a:schemeClr val="tx1"/>
+                </a:solidFill>
+                <a:latin typeface="+mj-lt"/>
+                <a:ea typeface="+mj-ea"/>
+                <a:cs typeface="+mj-cs"/>
+              </a:defRPr>
+            </a:lvl1pPr>
+          </a:lstStyle>
+          <a:p>
+            <a:r>
+              <a:rPr lang="ru-RU" dirty="0"/>
+              <a:t>Список литературы</a:t>
+            </a:r>
+          </a:p>
+        </p:txBody>
+      </p:sp>
+      <p:sp>
+        <p:nvSpPr>
+          <p:cNvPr id="7" name="Объект 2">
+            <a:extLst>
+              <a:ext uri="{FF2B5EF4-FFF2-40B4-BE49-F238E27FC236}">
+                <a16:creationId xmlns:a16="http://schemas.microsoft.com/office/drawing/2014/main" id="{1D3E4A0C-7F14-2260-6E2F-4D65AF898B31}"/>
+              </a:ext>
+            </a:extLst>
+          </p:cNvPr>
+          <p:cNvSpPr>
+            <a:spLocks noGrp="1"/>
+          </p:cNvSpPr>
+          <p:nvPr>
+            <p:ph idx="1"/>
+          </p:nvPr>
+        </p:nvSpPr>
+        <p:spPr>
+          <a:xfrm>
+            <a:off x="1055688" y="1936470"/>
+            <a:ext cx="10080625" cy="3791977"/>
+          </a:xfrm>
+        </p:spPr>
+        <p:txBody>
+          <a:bodyPr>
+            <a:noAutofit/>
+          </a:bodyPr>
+          <a:lstStyle/>
+          <a:p>
+            <a:pPr marL="457200" indent="-457200">
+              <a:lnSpc>
+                <a:spcPct val="100000"/>
+              </a:lnSpc>
+              <a:buFont typeface="+mj-lt"/>
+              <a:buAutoNum type="arabicPeriod" startAt="8"/>
+            </a:pPr>
+            <a:r>
+              <a:rPr lang="en-US" sz="2400" dirty="0"/>
+              <a:t>Wang Y. et al. Wi-mesh: A </a:t>
+            </a:r>
+            <a:r>
+              <a:rPr lang="en-US" sz="2400" dirty="0" err="1"/>
+              <a:t>wifi</a:t>
+            </a:r>
+            <a:r>
+              <a:rPr lang="en-US" sz="2400" dirty="0"/>
+              <a:t> vision-based approach for 3d human mesh construction //Proceedings of the 20th ACM Conference on Embedded Networked Sensor Systems. – 2022. – С. 362-376.</a:t>
+            </a:r>
+          </a:p>
+          <a:p>
+            <a:pPr marL="457200" indent="-457200">
+              <a:lnSpc>
+                <a:spcPct val="100000"/>
+              </a:lnSpc>
+              <a:buFont typeface="+mj-lt"/>
+              <a:buAutoNum type="arabicPeriod" startAt="8"/>
+            </a:pPr>
+            <a:r>
+              <a:rPr lang="en-US" sz="2400" dirty="0"/>
+              <a:t>Welzl E. Constructing the visibility graph for n-line segments in O (n2) time //Information Processing Letters. – 1985. – Т. 20. – №. 4. – С. 167-171.</a:t>
+            </a:r>
+          </a:p>
+          <a:p>
+            <a:pPr marL="457200" indent="-457200">
+              <a:lnSpc>
+                <a:spcPct val="100000"/>
+              </a:lnSpc>
+              <a:buFont typeface="+mj-lt"/>
+              <a:buAutoNum type="arabicPeriod" startAt="8"/>
+            </a:pPr>
+            <a:r>
+              <a:rPr lang="en-US" sz="2400" dirty="0"/>
+              <a:t>Ghosh S. K., Mount D. M. An output-sensitive algorithm for computing visibility graphs //SIAM Journal on Computing. – 1991. – Т. 20. – №. 5. – С. 888-910.</a:t>
+            </a:r>
+          </a:p>
+        </p:txBody>
+      </p:sp>
+    </p:spTree>
+    <p:extLst>
+      <p:ext uri="{BB962C8B-B14F-4D97-AF65-F5344CB8AC3E}">
+        <p14:creationId xmlns:p14="http://schemas.microsoft.com/office/powerpoint/2010/main" val="386874331"/>
       </p:ext>
     </p:extLst>
   </p:cSld>
@@ -8385,7 +8885,7 @@
         </p:blipFill>
         <p:spPr>
           <a:xfrm>
-            <a:off x="2794958" y="1954599"/>
+            <a:off x="2628703" y="1749102"/>
             <a:ext cx="6934593" cy="4299552"/>
           </a:xfrm>
         </p:spPr>
@@ -8482,7 +8982,7 @@
         </p:blipFill>
         <p:spPr>
           <a:xfrm>
-            <a:off x="2794958" y="1954599"/>
+            <a:off x="2777028" y="1829785"/>
             <a:ext cx="6934593" cy="4299552"/>
           </a:xfrm>
           <a:prstGeom prst="rect">
@@ -8550,8 +9050,8 @@
         </p:blipFill>
         <p:spPr>
           <a:xfrm>
-            <a:off x="2745481" y="2401747"/>
-            <a:ext cx="6213154" cy="3811588"/>
+            <a:off x="2719728" y="1845936"/>
+            <a:ext cx="6752544" cy="4142488"/>
           </a:xfrm>
           <a:prstGeom prst="rect">
             <a:avLst/>
